--- a/site/slides/presentation_template.pptx
+++ b/site/slides/presentation_template.pptx
@@ -3093,12 +3093,20 @@
         <p:nvPr/>
       </p:nvGrpSpPr>
       <p:grpSpPr/>
-      <p:sp>
-        <p:nvSpPr>
-          <p:cNvPr id="2" name="Rectangle 1"/>
-          <p:cNvSpPr/>
-          <p:nvPr/>
-        </p:nvSpPr>
+      <p:pic>
+        <p:nvPicPr>
+          <p:cNvPr id="2" name="Picture 1" descr="section.png"/>
+          <p:cNvPicPr>
+            <a:picLocks noChangeAspect="1"/>
+          </p:cNvPicPr>
+          <p:nvPr/>
+        </p:nvPicPr>
+        <p:blipFill>
+          <a:blip r:embed="rId2"/>
+          <a:stretch>
+            <a:fillRect/>
+          </a:stretch>
+        </p:blipFill>
         <p:spPr>
           <a:xfrm>
             <a:off x="0" y="0"/>
@@ -3107,8 +3115,96 @@
           <a:prstGeom prst="rect">
             <a:avLst/>
           </a:prstGeom>
+        </p:spPr>
+      </p:pic>
+      <p:sp>
+        <p:nvSpPr>
+          <p:cNvPr id="3" name="TextBox 2"/>
+          <p:cNvSpPr txBox="1"/>
+          <p:nvPr/>
+        </p:nvSpPr>
+        <p:spPr>
+          <a:xfrm>
+            <a:off x="914400" y="731520"/>
+            <a:ext cx="10332720" cy="457200"/>
+          </a:xfrm>
+          <a:prstGeom prst="rect">
+            <a:avLst/>
+          </a:prstGeom>
+          <a:noFill/>
+        </p:spPr>
+        <p:txBody>
+          <a:bodyPr wrap="square">
+            <a:spAutoFit/>
+          </a:bodyPr>
+          <a:lstStyle/>
+          <a:p>
+            <a:pPr algn="ctr">
+              <a:defRPr sz="1600" b="0">
+                <a:solidFill>
+                  <a:srgbClr val="DDDDEE"/>
+                </a:solidFill>
+                <a:latin typeface="Noto Sans JP"/>
+              </a:defRPr>
+            </a:pPr>
+            <a:r>
+              <a:t>Jagu'e'r 沖縄分科会 × サンエー × 琉球大学</a:t>
+            </a:r>
+          </a:p>
+        </p:txBody>
+      </p:sp>
+      <p:sp>
+        <p:nvSpPr>
+          <p:cNvPr id="4" name="TextBox 3"/>
+          <p:cNvSpPr txBox="1"/>
+          <p:nvPr/>
+        </p:nvSpPr>
+        <p:spPr>
+          <a:xfrm>
+            <a:off x="1371600" y="2011680"/>
+            <a:ext cx="9418320" cy="1371600"/>
+          </a:xfrm>
+          <a:prstGeom prst="rect">
+            <a:avLst/>
+          </a:prstGeom>
+          <a:noFill/>
+        </p:spPr>
+        <p:txBody>
+          <a:bodyPr wrap="square">
+            <a:spAutoFit/>
+          </a:bodyPr>
+          <a:lstStyle/>
+          <a:p>
+            <a:pPr algn="ctr">
+              <a:defRPr sz="5600" b="1">
+                <a:solidFill>
+                  <a:srgbClr val="FFFFFF"/>
+                </a:solidFill>
+                <a:latin typeface="Noto Sans JP"/>
+              </a:defRPr>
+            </a:pPr>
+            <a:r>
+              <a:t>チーム名</a:t>
+            </a:r>
+          </a:p>
+        </p:txBody>
+      </p:sp>
+      <p:sp>
+        <p:nvSpPr>
+          <p:cNvPr id="5" name="Rectangle 4"/>
+          <p:cNvSpPr/>
+          <p:nvPr/>
+        </p:nvSpPr>
+        <p:spPr>
+          <a:xfrm>
+            <a:off x="4114800" y="3474720"/>
+            <a:ext cx="3931920" cy="27432"/>
+          </a:xfrm>
+          <a:prstGeom prst="rect">
+            <a:avLst/>
+          </a:prstGeom>
           <a:solidFill>
-            <a:srgbClr val="023E8A"/>
+            <a:srgbClr val="88AADD"/>
           </a:solidFill>
           <a:ln>
             <a:noFill/>
@@ -3138,57 +3234,14 @@
       </p:sp>
       <p:sp>
         <p:nvSpPr>
-          <p:cNvPr id="3" name="Rectangle 2"/>
-          <p:cNvSpPr/>
-          <p:nvPr/>
-        </p:nvSpPr>
-        <p:spPr>
-          <a:xfrm>
-            <a:off x="0" y="5486400"/>
-            <a:ext cx="12191695" cy="1371600"/>
-          </a:xfrm>
-          <a:prstGeom prst="rect">
-            <a:avLst/>
-          </a:prstGeom>
-          <a:solidFill>
-            <a:srgbClr val="0077B6"/>
-          </a:solidFill>
-          <a:ln>
-            <a:noFill/>
-          </a:ln>
-        </p:spPr>
-        <p:style>
-          <a:lnRef idx="1">
-            <a:schemeClr val="accent1"/>
-          </a:lnRef>
-          <a:fillRef idx="3">
-            <a:schemeClr val="accent1"/>
-          </a:fillRef>
-          <a:effectRef idx="2">
-            <a:schemeClr val="accent1"/>
-          </a:effectRef>
-          <a:fontRef idx="minor">
-            <a:schemeClr val="lt1"/>
-          </a:fontRef>
-        </p:style>
-        <p:txBody>
-          <a:bodyPr rtlCol="0" anchor="ctr"/>
-          <a:lstStyle/>
-          <a:p>
-            <a:pPr algn="ctr"/>
-          </a:p>
-        </p:txBody>
-      </p:sp>
-      <p:sp>
-        <p:nvSpPr>
-          <p:cNvPr id="4" name="TextBox 3"/>
+          <p:cNvPr id="6" name="TextBox 5"/>
           <p:cNvSpPr txBox="1"/>
           <p:nvPr/>
         </p:nvSpPr>
         <p:spPr>
           <a:xfrm>
-            <a:off x="914400" y="731520"/>
-            <a:ext cx="10332720" cy="457200"/>
+            <a:off x="1371600" y="3657600"/>
+            <a:ext cx="9418320" cy="731520"/>
           </a:xfrm>
           <a:prstGeom prst="rect">
             <a:avLst/>
@@ -3196,97 +3249,22 @@
           <a:noFill/>
         </p:spPr>
         <p:txBody>
-          <a:bodyPr wrap="square"/>
+          <a:bodyPr wrap="square">
+            <a:spAutoFit/>
+          </a:bodyPr>
           <a:lstStyle/>
           <a:p>
             <a:pPr algn="ctr">
-              <a:defRPr sz="1600" b="0">
-                <a:solidFill>
-                  <a:srgbClr val="BBCCDD"/>
+              <a:defRPr sz="2000" b="0">
+                <a:solidFill>
+                  <a:srgbClr val="90E0EF"/>
                 </a:solidFill>
                 <a:latin typeface="Noto Sans JP"/>
               </a:defRPr>
             </a:pPr>
             <a:r>
-              <a:t>Jagu'e'r 沖縄分科会 × サンエー × 琉球大学</a:t>
-            </a:r>
-          </a:p>
-        </p:txBody>
-      </p:sp>
-      <p:sp>
-        <p:nvSpPr>
-          <p:cNvPr id="5" name="TextBox 4"/>
-          <p:cNvSpPr txBox="1"/>
-          <p:nvPr/>
-        </p:nvSpPr>
-        <p:spPr>
-          <a:xfrm>
-            <a:off x="1371600" y="1828800"/>
-            <a:ext cx="9418320" cy="1371600"/>
-          </a:xfrm>
-          <a:prstGeom prst="rect">
-            <a:avLst/>
-          </a:prstGeom>
-          <a:noFill/>
-        </p:spPr>
-        <p:txBody>
-          <a:bodyPr wrap="square"/>
-          <a:lstStyle/>
-          <a:p>
-            <a:pPr algn="ctr">
-              <a:defRPr sz="5600" b="1">
-                <a:solidFill>
-                  <a:srgbClr val="FFFFFF"/>
-                </a:solidFill>
-                <a:latin typeface="Noto Sans JP"/>
-              </a:defRPr>
-            </a:pPr>
-            <a:r>
-              <a:t>チーム名</a:t>
-            </a:r>
-          </a:p>
-        </p:txBody>
-      </p:sp>
-      <p:sp>
-        <p:nvSpPr>
-          <p:cNvPr id="6" name="Rectangle 5"/>
-          <p:cNvSpPr/>
-          <p:nvPr/>
-        </p:nvSpPr>
-        <p:spPr>
-          <a:xfrm>
-            <a:off x="4114800" y="3291840"/>
-            <a:ext cx="3931920" cy="27432"/>
-          </a:xfrm>
-          <a:prstGeom prst="rect">
-            <a:avLst/>
-          </a:prstGeom>
-          <a:solidFill>
-            <a:srgbClr val="5588BB"/>
-          </a:solidFill>
-          <a:ln>
-            <a:noFill/>
-          </a:ln>
-        </p:spPr>
-        <p:style>
-          <a:lnRef idx="1">
-            <a:schemeClr val="accent1"/>
-          </a:lnRef>
-          <a:fillRef idx="3">
-            <a:schemeClr val="accent1"/>
-          </a:fillRef>
-          <a:effectRef idx="2">
-            <a:schemeClr val="accent1"/>
-          </a:effectRef>
-          <a:fontRef idx="minor">
-            <a:schemeClr val="lt1"/>
-          </a:fontRef>
-        </p:style>
-        <p:txBody>
-          <a:bodyPr rtlCol="0" anchor="ctr"/>
-          <a:lstStyle/>
-          <a:p>
-            <a:pPr algn="ctr"/>
+              <a:t>データで考える、沖縄の「ちょうどいい」と「もっといい」</a:t>
+            </a:r>
           </a:p>
         </p:txBody>
       </p:sp>
@@ -3298,8 +3276,8 @@
         </p:nvSpPr>
         <p:spPr>
           <a:xfrm>
-            <a:off x="1371600" y="3474720"/>
-            <a:ext cx="9418320" cy="731520"/>
+            <a:off x="1371600" y="4389120"/>
+            <a:ext cx="9418320" cy="640080"/>
           </a:xfrm>
           <a:prstGeom prst="rect">
             <a:avLst/>
@@ -3307,19 +3285,21 @@
           <a:noFill/>
         </p:spPr>
         <p:txBody>
-          <a:bodyPr wrap="square"/>
+          <a:bodyPr wrap="square">
+            <a:spAutoFit/>
+          </a:bodyPr>
           <a:lstStyle/>
           <a:p>
             <a:pPr algn="ctr">
-              <a:defRPr sz="2000" b="0">
-                <a:solidFill>
-                  <a:srgbClr val="90E0EF"/>
+              <a:defRPr sz="2800" b="1">
+                <a:solidFill>
+                  <a:srgbClr val="FFFFFF"/>
                 </a:solidFill>
                 <a:latin typeface="Noto Sans JP"/>
               </a:defRPr>
             </a:pPr>
             <a:r>
-              <a:t>データで考える、沖縄の「ちょうどいい」と「もっといい」</a:t>
+              <a:t>成果発表</a:t>
             </a:r>
           </a:p>
         </p:txBody>
@@ -3332,8 +3312,8 @@
         </p:nvSpPr>
         <p:spPr>
           <a:xfrm>
-            <a:off x="1371600" y="4206240"/>
-            <a:ext cx="9418320" cy="640080"/>
+            <a:off x="731520" y="5943600"/>
+            <a:ext cx="2743200" cy="365760"/>
           </a:xfrm>
           <a:prstGeom prst="rect">
             <a:avLst/>
@@ -3341,19 +3321,21 @@
           <a:noFill/>
         </p:spPr>
         <p:txBody>
-          <a:bodyPr wrap="square"/>
-          <a:lstStyle/>
-          <a:p>
-            <a:pPr algn="ctr">
-              <a:defRPr sz="2800" b="1">
-                <a:solidFill>
-                  <a:srgbClr val="FFFFFF"/>
+          <a:bodyPr wrap="square">
+            <a:spAutoFit/>
+          </a:bodyPr>
+          <a:lstStyle/>
+          <a:p>
+            <a:pPr algn="l">
+              <a:defRPr sz="1400" b="0">
+                <a:solidFill>
+                  <a:srgbClr val="AABBDD"/>
                 </a:solidFill>
                 <a:latin typeface="Noto Sans JP"/>
               </a:defRPr>
             </a:pPr>
             <a:r>
-              <a:t>成果発表</a:t>
+              <a:t>2026.04.11</a:t>
             </a:r>
           </a:p>
         </p:txBody>
@@ -3366,40 +3348,6 @@
         </p:nvSpPr>
         <p:spPr>
           <a:xfrm>
-            <a:off x="731520" y="5943600"/>
-            <a:ext cx="2743200" cy="365760"/>
-          </a:xfrm>
-          <a:prstGeom prst="rect">
-            <a:avLst/>
-          </a:prstGeom>
-          <a:noFill/>
-        </p:spPr>
-        <p:txBody>
-          <a:bodyPr wrap="square"/>
-          <a:lstStyle/>
-          <a:p>
-            <a:pPr algn="l">
-              <a:defRPr sz="1400" b="0">
-                <a:solidFill>
-                  <a:srgbClr val="88AACC"/>
-                </a:solidFill>
-                <a:latin typeface="Noto Sans JP"/>
-              </a:defRPr>
-            </a:pPr>
-            <a:r>
-              <a:t>2026.04.11</a:t>
-            </a:r>
-          </a:p>
-        </p:txBody>
-      </p:sp>
-      <p:sp>
-        <p:nvSpPr>
-          <p:cNvPr id="10" name="TextBox 9"/>
-          <p:cNvSpPr txBox="1"/>
-          <p:nvPr/>
-        </p:nvSpPr>
-        <p:spPr>
-          <a:xfrm>
             <a:off x="6400800" y="5943600"/>
             <a:ext cx="5303520" cy="365760"/>
           </a:xfrm>
@@ -3409,13 +3357,15 @@
           <a:noFill/>
         </p:spPr>
         <p:txBody>
-          <a:bodyPr wrap="square"/>
+          <a:bodyPr wrap="square">
+            <a:spAutoFit/>
+          </a:bodyPr>
           <a:lstStyle/>
           <a:p>
             <a:pPr algn="r">
               <a:defRPr sz="1400" b="0">
                 <a:solidFill>
-                  <a:srgbClr val="88AACC"/>
+                  <a:srgbClr val="AABBDD"/>
                 </a:solidFill>
                 <a:latin typeface="Noto Sans JP"/>
               </a:defRPr>
@@ -3444,22 +3394,118 @@
         <p:nvPr/>
       </p:nvGrpSpPr>
       <p:grpSpPr/>
-      <p:sp>
-        <p:nvSpPr>
-          <p:cNvPr id="2" name="Rectangle 1"/>
+      <p:pic>
+        <p:nvPicPr>
+          <p:cNvPr id="2" name="Picture 1" descr="bg.png"/>
+          <p:cNvPicPr>
+            <a:picLocks noChangeAspect="1"/>
+          </p:cNvPicPr>
+          <p:nvPr/>
+        </p:nvPicPr>
+        <p:blipFill>
+          <a:blip r:embed="rId2"/>
+          <a:stretch>
+            <a:fillRect/>
+          </a:stretch>
+        </p:blipFill>
+        <p:spPr>
+          <a:xfrm>
+            <a:off x="0" y="0"/>
+            <a:ext cx="12191695" cy="6858000"/>
+          </a:xfrm>
+          <a:prstGeom prst="rect">
+            <a:avLst/>
+          </a:prstGeom>
+        </p:spPr>
+      </p:pic>
+      <p:sp>
+        <p:nvSpPr>
+          <p:cNvPr id="3" name="TextBox 2"/>
+          <p:cNvSpPr txBox="1"/>
+          <p:nvPr/>
+        </p:nvSpPr>
+        <p:spPr>
+          <a:xfrm>
+            <a:off x="731520" y="457200"/>
+            <a:ext cx="2743200" cy="274320"/>
+          </a:xfrm>
+          <a:prstGeom prst="rect">
+            <a:avLst/>
+          </a:prstGeom>
+          <a:noFill/>
+        </p:spPr>
+        <p:txBody>
+          <a:bodyPr wrap="square">
+            <a:spAutoFit/>
+          </a:bodyPr>
+          <a:lstStyle/>
+          <a:p>
+            <a:pPr algn="l">
+              <a:defRPr sz="1100" b="1">
+                <a:solidFill>
+                  <a:srgbClr val="0077B6"/>
+                </a:solidFill>
+                <a:latin typeface="Noto Sans JP"/>
+              </a:defRPr>
+            </a:pPr>
+            <a:r>
+              <a:t>QUESTION</a:t>
+            </a:r>
+          </a:p>
+        </p:txBody>
+      </p:sp>
+      <p:sp>
+        <p:nvSpPr>
+          <p:cNvPr id="4" name="TextBox 3"/>
+          <p:cNvSpPr txBox="1"/>
+          <p:nvPr/>
+        </p:nvSpPr>
+        <p:spPr>
+          <a:xfrm>
+            <a:off x="914400" y="1645920"/>
+            <a:ext cx="10332720" cy="1828800"/>
+          </a:xfrm>
+          <a:prstGeom prst="rect">
+            <a:avLst/>
+          </a:prstGeom>
+          <a:noFill/>
+        </p:spPr>
+        <p:txBody>
+          <a:bodyPr wrap="square">
+            <a:spAutoFit/>
+          </a:bodyPr>
+          <a:lstStyle/>
+          <a:p>
+            <a:pPr algn="ctr">
+              <a:defRPr sz="4000" b="1">
+                <a:solidFill>
+                  <a:srgbClr val="023E8A"/>
+                </a:solidFill>
+                <a:latin typeface="Noto Sans JP"/>
+              </a:defRPr>
+            </a:pPr>
+            <a:r>
+              <a:t>私たちが取り組んだ問い</a:t>
+            </a:r>
+          </a:p>
+        </p:txBody>
+      </p:sp>
+      <p:sp>
+        <p:nvSpPr>
+          <p:cNvPr id="5" name="Rounded Rectangle 4"/>
           <p:cNvSpPr/>
           <p:nvPr/>
         </p:nvSpPr>
         <p:spPr>
           <a:xfrm>
-            <a:off x="0" y="0"/>
-            <a:ext cx="12191695" cy="73152"/>
-          </a:xfrm>
-          <a:prstGeom prst="rect">
+            <a:off x="1371600" y="4114800"/>
+            <a:ext cx="9418320" cy="1645920"/>
+          </a:xfrm>
+          <a:prstGeom prst="roundRect">
             <a:avLst/>
           </a:prstGeom>
           <a:solidFill>
-            <a:srgbClr val="0077B6"/>
+            <a:srgbClr val="F0F7FF"/>
           </a:solidFill>
           <a:ln>
             <a:noFill/>
@@ -3489,88 +3535,20 @@
       </p:sp>
       <p:sp>
         <p:nvSpPr>
-          <p:cNvPr id="3" name="TextBox 2"/>
-          <p:cNvSpPr txBox="1"/>
-          <p:nvPr/>
-        </p:nvSpPr>
-        <p:spPr>
-          <a:xfrm>
-            <a:off x="731520" y="365760"/>
-            <a:ext cx="2743200" cy="274320"/>
-          </a:xfrm>
-          <a:prstGeom prst="rect">
-            <a:avLst/>
-          </a:prstGeom>
-          <a:noFill/>
-        </p:spPr>
-        <p:txBody>
-          <a:bodyPr wrap="square"/>
-          <a:lstStyle/>
-          <a:p>
-            <a:pPr algn="l">
-              <a:defRPr sz="1100" b="1">
-                <a:solidFill>
-                  <a:srgbClr val="0077B6"/>
-                </a:solidFill>
-                <a:latin typeface="Noto Sans JP"/>
-              </a:defRPr>
-            </a:pPr>
-            <a:r>
-              <a:t>QUESTION</a:t>
-            </a:r>
-          </a:p>
-        </p:txBody>
-      </p:sp>
-      <p:sp>
-        <p:nvSpPr>
-          <p:cNvPr id="4" name="TextBox 3"/>
-          <p:cNvSpPr txBox="1"/>
-          <p:nvPr/>
-        </p:nvSpPr>
-        <p:spPr>
-          <a:xfrm>
-            <a:off x="914400" y="1371600"/>
-            <a:ext cx="10332720" cy="1828800"/>
-          </a:xfrm>
-          <a:prstGeom prst="rect">
-            <a:avLst/>
-          </a:prstGeom>
-          <a:noFill/>
-        </p:spPr>
-        <p:txBody>
-          <a:bodyPr wrap="square"/>
-          <a:lstStyle/>
-          <a:p>
-            <a:pPr algn="ctr">
-              <a:defRPr sz="4000" b="1">
-                <a:solidFill>
-                  <a:srgbClr val="023E8A"/>
-                </a:solidFill>
-                <a:latin typeface="Noto Sans JP"/>
-              </a:defRPr>
-            </a:pPr>
-            <a:r>
-              <a:t>私たちが取り組んだ問い</a:t>
-            </a:r>
-          </a:p>
-        </p:txBody>
-      </p:sp>
-      <p:sp>
-        <p:nvSpPr>
-          <p:cNvPr id="5" name="Rounded Rectangle 4"/>
+          <p:cNvPr id="6" name="Rectangle 5"/>
           <p:cNvSpPr/>
           <p:nvPr/>
         </p:nvSpPr>
         <p:spPr>
           <a:xfrm>
             <a:off x="1371600" y="4114800"/>
-            <a:ext cx="9418320" cy="1645920"/>
-          </a:xfrm>
-          <a:prstGeom prst="roundRect">
+            <a:ext cx="54864" cy="1645920"/>
+          </a:xfrm>
+          <a:prstGeom prst="rect">
             <a:avLst/>
           </a:prstGeom>
           <a:solidFill>
-            <a:srgbClr val="F0F7FF"/>
+            <a:srgbClr val="0077B6"/>
           </a:solidFill>
           <a:ln>
             <a:noFill/>
@@ -3600,49 +3578,6 @@
       </p:sp>
       <p:sp>
         <p:nvSpPr>
-          <p:cNvPr id="6" name="Rectangle 5"/>
-          <p:cNvSpPr/>
-          <p:nvPr/>
-        </p:nvSpPr>
-        <p:spPr>
-          <a:xfrm>
-            <a:off x="1371600" y="4114800"/>
-            <a:ext cx="54864" cy="1645920"/>
-          </a:xfrm>
-          <a:prstGeom prst="rect">
-            <a:avLst/>
-          </a:prstGeom>
-          <a:solidFill>
-            <a:srgbClr val="0077B6"/>
-          </a:solidFill>
-          <a:ln>
-            <a:noFill/>
-          </a:ln>
-        </p:spPr>
-        <p:style>
-          <a:lnRef idx="1">
-            <a:schemeClr val="accent1"/>
-          </a:lnRef>
-          <a:fillRef idx="3">
-            <a:schemeClr val="accent1"/>
-          </a:fillRef>
-          <a:effectRef idx="2">
-            <a:schemeClr val="accent1"/>
-          </a:effectRef>
-          <a:fontRef idx="minor">
-            <a:schemeClr val="lt1"/>
-          </a:fontRef>
-        </p:style>
-        <p:txBody>
-          <a:bodyPr rtlCol="0" anchor="ctr"/>
-          <a:lstStyle/>
-          <a:p>
-            <a:pPr algn="ctr"/>
-          </a:p>
-        </p:txBody>
-      </p:sp>
-      <p:sp>
-        <p:nvSpPr>
           <p:cNvPr id="7" name="TextBox 6"/>
           <p:cNvSpPr txBox="1"/>
           <p:nvPr/>
@@ -3714,57 +3649,14 @@
       </p:sp>
       <p:sp>
         <p:nvSpPr>
-          <p:cNvPr id="8" name="Rectangle 7"/>
-          <p:cNvSpPr/>
-          <p:nvPr/>
-        </p:nvSpPr>
-        <p:spPr>
-          <a:xfrm>
-            <a:off x="0" y="6492240"/>
-            <a:ext cx="12191695" cy="18288"/>
-          </a:xfrm>
-          <a:prstGeom prst="rect">
-            <a:avLst/>
-          </a:prstGeom>
-          <a:solidFill>
-            <a:srgbClr val="E2E8F0"/>
-          </a:solidFill>
-          <a:ln>
-            <a:noFill/>
-          </a:ln>
-        </p:spPr>
-        <p:style>
-          <a:lnRef idx="1">
-            <a:schemeClr val="accent1"/>
-          </a:lnRef>
-          <a:fillRef idx="3">
-            <a:schemeClr val="accent1"/>
-          </a:fillRef>
-          <a:effectRef idx="2">
-            <a:schemeClr val="accent1"/>
-          </a:effectRef>
-          <a:fontRef idx="minor">
-            <a:schemeClr val="lt1"/>
-          </a:fontRef>
-        </p:style>
-        <p:txBody>
-          <a:bodyPr rtlCol="0" anchor="ctr"/>
-          <a:lstStyle/>
-          <a:p>
-            <a:pPr algn="ctr"/>
-          </a:p>
-        </p:txBody>
-      </p:sp>
-      <p:sp>
-        <p:nvSpPr>
-          <p:cNvPr id="9" name="TextBox 8"/>
+          <p:cNvPr id="8" name="TextBox 7"/>
           <p:cNvSpPr txBox="1"/>
           <p:nvPr/>
         </p:nvSpPr>
         <p:spPr>
           <a:xfrm>
-            <a:off x="457200" y="6537960"/>
-            <a:ext cx="7315200" cy="274320"/>
+            <a:off x="10972800" y="6492240"/>
+            <a:ext cx="914400" cy="274320"/>
           </a:xfrm>
           <a:prstGeom prst="rect">
             <a:avLst/>
@@ -3772,41 +3664,9 @@
           <a:noFill/>
         </p:spPr>
         <p:txBody>
-          <a:bodyPr wrap="square"/>
-          <a:lstStyle/>
-          <a:p>
-            <a:pPr algn="l">
-              <a:defRPr sz="900" b="0">
-                <a:solidFill>
-                  <a:srgbClr val="94A3B8"/>
-                </a:solidFill>
-                <a:latin typeface="Noto Sans JP"/>
-              </a:defRPr>
-            </a:pPr>
-            <a:r>
-              <a:t>データで考える、沖縄の「ちょうどいい」と「もっといい」</a:t>
-            </a:r>
-          </a:p>
-        </p:txBody>
-      </p:sp>
-      <p:sp>
-        <p:nvSpPr>
-          <p:cNvPr id="10" name="TextBox 9"/>
-          <p:cNvSpPr txBox="1"/>
-          <p:nvPr/>
-        </p:nvSpPr>
-        <p:spPr>
-          <a:xfrm>
-            <a:off x="10972800" y="6537960"/>
-            <a:ext cx="914400" cy="274320"/>
-          </a:xfrm>
-          <a:prstGeom prst="rect">
-            <a:avLst/>
-          </a:prstGeom>
-          <a:noFill/>
-        </p:spPr>
-        <p:txBody>
-          <a:bodyPr wrap="square"/>
+          <a:bodyPr wrap="square">
+            <a:spAutoFit/>
+          </a:bodyPr>
           <a:lstStyle/>
           <a:p>
             <a:pPr algn="r">
@@ -3841,18 +3701,114 @@
         <p:nvPr/>
       </p:nvGrpSpPr>
       <p:grpSpPr/>
-      <p:sp>
-        <p:nvSpPr>
-          <p:cNvPr id="2" name="Rectangle 1"/>
+      <p:pic>
+        <p:nvPicPr>
+          <p:cNvPr id="2" name="Picture 1" descr="bg.png"/>
+          <p:cNvPicPr>
+            <a:picLocks noChangeAspect="1"/>
+          </p:cNvPicPr>
+          <p:nvPr/>
+        </p:nvPicPr>
+        <p:blipFill>
+          <a:blip r:embed="rId2"/>
+          <a:stretch>
+            <a:fillRect/>
+          </a:stretch>
+        </p:blipFill>
+        <p:spPr>
+          <a:xfrm>
+            <a:off x="0" y="0"/>
+            <a:ext cx="12191695" cy="6858000"/>
+          </a:xfrm>
+          <a:prstGeom prst="rect">
+            <a:avLst/>
+          </a:prstGeom>
+        </p:spPr>
+      </p:pic>
+      <p:sp>
+        <p:nvSpPr>
+          <p:cNvPr id="3" name="TextBox 2"/>
+          <p:cNvSpPr txBox="1"/>
+          <p:nvPr/>
+        </p:nvSpPr>
+        <p:spPr>
+          <a:xfrm>
+            <a:off x="731520" y="457200"/>
+            <a:ext cx="2743200" cy="274320"/>
+          </a:xfrm>
+          <a:prstGeom prst="rect">
+            <a:avLst/>
+          </a:prstGeom>
+          <a:noFill/>
+        </p:spPr>
+        <p:txBody>
+          <a:bodyPr wrap="square">
+            <a:spAutoFit/>
+          </a:bodyPr>
+          <a:lstStyle/>
+          <a:p>
+            <a:pPr algn="l">
+              <a:defRPr sz="1100" b="1">
+                <a:solidFill>
+                  <a:srgbClr val="0077B6"/>
+                </a:solidFill>
+                <a:latin typeface="Noto Sans JP"/>
+              </a:defRPr>
+            </a:pPr>
+            <a:r>
+              <a:t>APPROACH</a:t>
+            </a:r>
+          </a:p>
+        </p:txBody>
+      </p:sp>
+      <p:sp>
+        <p:nvSpPr>
+          <p:cNvPr id="4" name="TextBox 3"/>
+          <p:cNvSpPr txBox="1"/>
+          <p:nvPr/>
+        </p:nvSpPr>
+        <p:spPr>
+          <a:xfrm>
+            <a:off x="731520" y="822960"/>
+            <a:ext cx="5486400" cy="640080"/>
+          </a:xfrm>
+          <a:prstGeom prst="rect">
+            <a:avLst/>
+          </a:prstGeom>
+          <a:noFill/>
+        </p:spPr>
+        <p:txBody>
+          <a:bodyPr wrap="square">
+            <a:spAutoFit/>
+          </a:bodyPr>
+          <a:lstStyle/>
+          <a:p>
+            <a:pPr algn="l">
+              <a:defRPr sz="3200" b="1">
+                <a:solidFill>
+                  <a:srgbClr val="023E8A"/>
+                </a:solidFill>
+                <a:latin typeface="Noto Sans JP"/>
+              </a:defRPr>
+            </a:pPr>
+            <a:r>
+              <a:t>分析アプローチ</a:t>
+            </a:r>
+          </a:p>
+        </p:txBody>
+      </p:sp>
+      <p:sp>
+        <p:nvSpPr>
+          <p:cNvPr id="5" name="Oval 4"/>
           <p:cNvSpPr/>
           <p:nvPr/>
         </p:nvSpPr>
         <p:spPr>
           <a:xfrm>
-            <a:off x="0" y="0"/>
-            <a:ext cx="12191695" cy="73152"/>
-          </a:xfrm>
-          <a:prstGeom prst="rect">
+            <a:off x="2103120" y="1828800"/>
+            <a:ext cx="640080" cy="640080"/>
+          </a:xfrm>
+          <a:prstGeom prst="ellipse">
             <a:avLst/>
           </a:prstGeom>
           <a:solidFill>
@@ -3886,14 +3842,14 @@
       </p:sp>
       <p:sp>
         <p:nvSpPr>
-          <p:cNvPr id="3" name="TextBox 2"/>
+          <p:cNvPr id="6" name="TextBox 5"/>
           <p:cNvSpPr txBox="1"/>
           <p:nvPr/>
         </p:nvSpPr>
         <p:spPr>
           <a:xfrm>
-            <a:off x="731520" y="365760"/>
-            <a:ext cx="2743200" cy="274320"/>
+            <a:off x="2103120" y="1874519"/>
+            <a:ext cx="640080" cy="640080"/>
           </a:xfrm>
           <a:prstGeom prst="rect">
             <a:avLst/>
@@ -3901,33 +3857,35 @@
           <a:noFill/>
         </p:spPr>
         <p:txBody>
-          <a:bodyPr wrap="square"/>
-          <a:lstStyle/>
-          <a:p>
-            <a:pPr algn="l">
-              <a:defRPr sz="1100" b="1">
-                <a:solidFill>
-                  <a:srgbClr val="0077B6"/>
+          <a:bodyPr wrap="square">
+            <a:spAutoFit/>
+          </a:bodyPr>
+          <a:lstStyle/>
+          <a:p>
+            <a:pPr algn="ctr">
+              <a:defRPr sz="2200" b="1">
+                <a:solidFill>
+                  <a:srgbClr val="FFFFFF"/>
                 </a:solidFill>
                 <a:latin typeface="Noto Sans JP"/>
               </a:defRPr>
             </a:pPr>
             <a:r>
-              <a:t>APPROACH</a:t>
-            </a:r>
-          </a:p>
-        </p:txBody>
-      </p:sp>
-      <p:sp>
-        <p:nvSpPr>
-          <p:cNvPr id="4" name="TextBox 3"/>
+              <a:t>1</a:t>
+            </a:r>
+          </a:p>
+        </p:txBody>
+      </p:sp>
+      <p:sp>
+        <p:nvSpPr>
+          <p:cNvPr id="7" name="TextBox 6"/>
           <p:cNvSpPr txBox="1"/>
           <p:nvPr/>
         </p:nvSpPr>
         <p:spPr>
           <a:xfrm>
-            <a:off x="731520" y="731520"/>
-            <a:ext cx="5486400" cy="640080"/>
+            <a:off x="1371600" y="2651760"/>
+            <a:ext cx="2103120" cy="457200"/>
           </a:xfrm>
           <a:prstGeom prst="rect">
             <a:avLst/>
@@ -3935,11 +3893,13 @@
           <a:noFill/>
         </p:spPr>
         <p:txBody>
-          <a:bodyPr wrap="square"/>
-          <a:lstStyle/>
-          <a:p>
-            <a:pPr algn="l">
-              <a:defRPr sz="3200" b="1">
+          <a:bodyPr wrap="square">
+            <a:spAutoFit/>
+          </a:bodyPr>
+          <a:lstStyle/>
+          <a:p>
+            <a:pPr algn="ctr">
+              <a:defRPr sz="2000" b="1">
                 <a:solidFill>
                   <a:srgbClr val="023E8A"/>
                 </a:solidFill>
@@ -3947,20 +3907,56 @@
               </a:defRPr>
             </a:pPr>
             <a:r>
-              <a:t>分析アプローチ</a:t>
-            </a:r>
-          </a:p>
-        </p:txBody>
-      </p:sp>
-      <p:sp>
-        <p:nvSpPr>
-          <p:cNvPr id="5" name="Oval 4"/>
+              <a:t>仮説</a:t>
+            </a:r>
+          </a:p>
+        </p:txBody>
+      </p:sp>
+      <p:sp>
+        <p:nvSpPr>
+          <p:cNvPr id="8" name="TextBox 7"/>
+          <p:cNvSpPr txBox="1"/>
+          <p:nvPr/>
+        </p:nvSpPr>
+        <p:spPr>
+          <a:xfrm>
+            <a:off x="1371600" y="3108960"/>
+            <a:ext cx="2103120" cy="1097280"/>
+          </a:xfrm>
+          <a:prstGeom prst="rect">
+            <a:avLst/>
+          </a:prstGeom>
+          <a:noFill/>
+        </p:spPr>
+        <p:txBody>
+          <a:bodyPr wrap="square">
+            <a:spAutoFit/>
+          </a:bodyPr>
+          <a:lstStyle/>
+          <a:p>
+            <a:pPr algn="ctr">
+              <a:defRPr sz="1300" b="0">
+                <a:solidFill>
+                  <a:srgbClr val="64748B"/>
+                </a:solidFill>
+                <a:latin typeface="Noto Sans JP"/>
+              </a:defRPr>
+            </a:pPr>
+            <a:r>
+              <a:t>ここに仮説を記入</a:t>
+            </a:r>
+          </a:p>
+        </p:txBody>
+      </p:sp>
+      <p:sp>
+        <p:nvSpPr>
+          <p:cNvPr id="9" name="Oval 8"/>
           <p:cNvSpPr/>
           <p:nvPr/>
         </p:nvSpPr>
         <p:spPr>
           <a:xfrm>
-            <a:off x="2103120" y="1828800"/>
+            <a:off x="5486400" y="1828800"/>
             <a:ext cx="640080" cy="640080"/>
           </a:xfrm>
           <a:prstGeom prst="ellipse">
@@ -3997,13 +3993,13 @@
       </p:sp>
       <p:sp>
         <p:nvSpPr>
-          <p:cNvPr id="6" name="TextBox 5"/>
+          <p:cNvPr id="10" name="TextBox 9"/>
           <p:cNvSpPr txBox="1"/>
           <p:nvPr/>
         </p:nvSpPr>
         <p:spPr>
           <a:xfrm>
-            <a:off x="2103120" y="1874519"/>
+            <a:off x="5486400" y="1874519"/>
             <a:ext cx="640080" cy="640080"/>
           </a:xfrm>
           <a:prstGeom prst="rect">
@@ -4012,7 +4008,9 @@
           <a:noFill/>
         </p:spPr>
         <p:txBody>
-          <a:bodyPr wrap="square"/>
+          <a:bodyPr wrap="square">
+            <a:spAutoFit/>
+          </a:bodyPr>
           <a:lstStyle/>
           <a:p>
             <a:pPr algn="ctr">
@@ -4024,20 +4022,20 @@
               </a:defRPr>
             </a:pPr>
             <a:r>
-              <a:t>1</a:t>
-            </a:r>
-          </a:p>
-        </p:txBody>
-      </p:sp>
-      <p:sp>
-        <p:nvSpPr>
-          <p:cNvPr id="7" name="TextBox 6"/>
+              <a:t>2</a:t>
+            </a:r>
+          </a:p>
+        </p:txBody>
+      </p:sp>
+      <p:sp>
+        <p:nvSpPr>
+          <p:cNvPr id="11" name="TextBox 10"/>
           <p:cNvSpPr txBox="1"/>
           <p:nvPr/>
         </p:nvSpPr>
         <p:spPr>
           <a:xfrm>
-            <a:off x="1371600" y="2651760"/>
+            <a:off x="4754880" y="2651760"/>
             <a:ext cx="2103120" cy="457200"/>
           </a:xfrm>
           <a:prstGeom prst="rect">
@@ -4046,7 +4044,9 @@
           <a:noFill/>
         </p:spPr>
         <p:txBody>
-          <a:bodyPr wrap="square"/>
+          <a:bodyPr wrap="square">
+            <a:spAutoFit/>
+          </a:bodyPr>
           <a:lstStyle/>
           <a:p>
             <a:pPr algn="ctr">
@@ -4058,20 +4058,20 @@
               </a:defRPr>
             </a:pPr>
             <a:r>
-              <a:t>仮説</a:t>
-            </a:r>
-          </a:p>
-        </p:txBody>
-      </p:sp>
-      <p:sp>
-        <p:nvSpPr>
-          <p:cNvPr id="8" name="TextBox 7"/>
+              <a:t>分析</a:t>
+            </a:r>
+          </a:p>
+        </p:txBody>
+      </p:sp>
+      <p:sp>
+        <p:nvSpPr>
+          <p:cNvPr id="12" name="TextBox 11"/>
           <p:cNvSpPr txBox="1"/>
           <p:nvPr/>
         </p:nvSpPr>
         <p:spPr>
           <a:xfrm>
-            <a:off x="1371600" y="3108960"/>
+            <a:off x="4754880" y="3108960"/>
             <a:ext cx="2103120" cy="1097280"/>
           </a:xfrm>
           <a:prstGeom prst="rect">
@@ -4080,7 +4080,9 @@
           <a:noFill/>
         </p:spPr>
         <p:txBody>
-          <a:bodyPr wrap="square"/>
+          <a:bodyPr wrap="square">
+            <a:spAutoFit/>
+          </a:bodyPr>
           <a:lstStyle/>
           <a:p>
             <a:pPr algn="ctr">
@@ -4092,20 +4094,20 @@
               </a:defRPr>
             </a:pPr>
             <a:r>
-              <a:t>ここに仮説を記入</a:t>
-            </a:r>
-          </a:p>
-        </p:txBody>
-      </p:sp>
-      <p:sp>
-        <p:nvSpPr>
-          <p:cNvPr id="9" name="Oval 8"/>
+              <a:t>使用した分析手法を記入</a:t>
+            </a:r>
+          </a:p>
+        </p:txBody>
+      </p:sp>
+      <p:sp>
+        <p:nvSpPr>
+          <p:cNvPr id="13" name="Oval 12"/>
           <p:cNvSpPr/>
           <p:nvPr/>
         </p:nvSpPr>
         <p:spPr>
           <a:xfrm>
-            <a:off x="5486400" y="1828800"/>
+            <a:off x="8869680" y="1828800"/>
             <a:ext cx="640080" cy="640080"/>
           </a:xfrm>
           <a:prstGeom prst="ellipse">
@@ -4142,13 +4144,13 @@
       </p:sp>
       <p:sp>
         <p:nvSpPr>
-          <p:cNvPr id="10" name="TextBox 9"/>
+          <p:cNvPr id="14" name="TextBox 13"/>
           <p:cNvSpPr txBox="1"/>
           <p:nvPr/>
         </p:nvSpPr>
         <p:spPr>
           <a:xfrm>
-            <a:off x="5486400" y="1874519"/>
+            <a:off x="8869680" y="1874519"/>
             <a:ext cx="640080" cy="640080"/>
           </a:xfrm>
           <a:prstGeom prst="rect">
@@ -4157,7 +4159,9 @@
           <a:noFill/>
         </p:spPr>
         <p:txBody>
-          <a:bodyPr wrap="square"/>
+          <a:bodyPr wrap="square">
+            <a:spAutoFit/>
+          </a:bodyPr>
           <a:lstStyle/>
           <a:p>
             <a:pPr algn="ctr">
@@ -4169,20 +4173,20 @@
               </a:defRPr>
             </a:pPr>
             <a:r>
-              <a:t>2</a:t>
-            </a:r>
-          </a:p>
-        </p:txBody>
-      </p:sp>
-      <p:sp>
-        <p:nvSpPr>
-          <p:cNvPr id="11" name="TextBox 10"/>
+              <a:t>3</a:t>
+            </a:r>
+          </a:p>
+        </p:txBody>
+      </p:sp>
+      <p:sp>
+        <p:nvSpPr>
+          <p:cNvPr id="15" name="TextBox 14"/>
           <p:cNvSpPr txBox="1"/>
           <p:nvPr/>
         </p:nvSpPr>
         <p:spPr>
           <a:xfrm>
-            <a:off x="4754880" y="2651760"/>
+            <a:off x="8138160" y="2651760"/>
             <a:ext cx="2103120" cy="457200"/>
           </a:xfrm>
           <a:prstGeom prst="rect">
@@ -4191,7 +4195,9 @@
           <a:noFill/>
         </p:spPr>
         <p:txBody>
-          <a:bodyPr wrap="square"/>
+          <a:bodyPr wrap="square">
+            <a:spAutoFit/>
+          </a:bodyPr>
           <a:lstStyle/>
           <a:p>
             <a:pPr algn="ctr">
@@ -4203,20 +4209,20 @@
               </a:defRPr>
             </a:pPr>
             <a:r>
-              <a:t>分析</a:t>
-            </a:r>
-          </a:p>
-        </p:txBody>
-      </p:sp>
-      <p:sp>
-        <p:nvSpPr>
-          <p:cNvPr id="12" name="TextBox 11"/>
+              <a:t>検証</a:t>
+            </a:r>
+          </a:p>
+        </p:txBody>
+      </p:sp>
+      <p:sp>
+        <p:nvSpPr>
+          <p:cNvPr id="16" name="TextBox 15"/>
           <p:cNvSpPr txBox="1"/>
           <p:nvPr/>
         </p:nvSpPr>
         <p:spPr>
           <a:xfrm>
-            <a:off x="4754880" y="3108960"/>
+            <a:off x="8138160" y="3108960"/>
             <a:ext cx="2103120" cy="1097280"/>
           </a:xfrm>
           <a:prstGeom prst="rect">
@@ -4225,7 +4231,9 @@
           <a:noFill/>
         </p:spPr>
         <p:txBody>
-          <a:bodyPr wrap="square"/>
+          <a:bodyPr wrap="square">
+            <a:spAutoFit/>
+          </a:bodyPr>
           <a:lstStyle/>
           <a:p>
             <a:pPr algn="ctr">
@@ -4237,27 +4245,99 @@
               </a:defRPr>
             </a:pPr>
             <a:r>
-              <a:t>使用した分析手法を記入</a:t>
-            </a:r>
-          </a:p>
-        </p:txBody>
-      </p:sp>
-      <p:sp>
-        <p:nvSpPr>
-          <p:cNvPr id="13" name="Oval 12"/>
+              <a:t>結果からの検証を記入</a:t>
+            </a:r>
+          </a:p>
+        </p:txBody>
+      </p:sp>
+      <p:sp>
+        <p:nvSpPr>
+          <p:cNvPr id="17" name="TextBox 16"/>
+          <p:cNvSpPr txBox="1"/>
+          <p:nvPr/>
+        </p:nvSpPr>
+        <p:spPr>
+          <a:xfrm>
+            <a:off x="3200400" y="1965960"/>
+            <a:ext cx="457200" cy="457200"/>
+          </a:xfrm>
+          <a:prstGeom prst="rect">
+            <a:avLst/>
+          </a:prstGeom>
+          <a:noFill/>
+        </p:spPr>
+        <p:txBody>
+          <a:bodyPr wrap="square">
+            <a:spAutoFit/>
+          </a:bodyPr>
+          <a:lstStyle/>
+          <a:p>
+            <a:pPr algn="ctr">
+              <a:defRPr sz="2400" b="0">
+                <a:solidFill>
+                  <a:srgbClr val="CBD5E1"/>
+                </a:solidFill>
+                <a:latin typeface="Noto Sans JP"/>
+              </a:defRPr>
+            </a:pPr>
+            <a:r>
+              <a:t>→</a:t>
+            </a:r>
+          </a:p>
+        </p:txBody>
+      </p:sp>
+      <p:sp>
+        <p:nvSpPr>
+          <p:cNvPr id="18" name="TextBox 17"/>
+          <p:cNvSpPr txBox="1"/>
+          <p:nvPr/>
+        </p:nvSpPr>
+        <p:spPr>
+          <a:xfrm>
+            <a:off x="6583680" y="1965960"/>
+            <a:ext cx="457200" cy="457200"/>
+          </a:xfrm>
+          <a:prstGeom prst="rect">
+            <a:avLst/>
+          </a:prstGeom>
+          <a:noFill/>
+        </p:spPr>
+        <p:txBody>
+          <a:bodyPr wrap="square">
+            <a:spAutoFit/>
+          </a:bodyPr>
+          <a:lstStyle/>
+          <a:p>
+            <a:pPr algn="ctr">
+              <a:defRPr sz="2400" b="0">
+                <a:solidFill>
+                  <a:srgbClr val="CBD5E1"/>
+                </a:solidFill>
+                <a:latin typeface="Noto Sans JP"/>
+              </a:defRPr>
+            </a:pPr>
+            <a:r>
+              <a:t>→</a:t>
+            </a:r>
+          </a:p>
+        </p:txBody>
+      </p:sp>
+      <p:sp>
+        <p:nvSpPr>
+          <p:cNvPr id="19" name="Rounded Rectangle 18"/>
           <p:cNvSpPr/>
           <p:nvPr/>
         </p:nvSpPr>
         <p:spPr>
           <a:xfrm>
-            <a:off x="8869680" y="1828800"/>
-            <a:ext cx="640080" cy="640080"/>
-          </a:xfrm>
-          <a:prstGeom prst="ellipse">
+            <a:off x="731520" y="4572000"/>
+            <a:ext cx="10698480" cy="1828800"/>
+          </a:xfrm>
+          <a:prstGeom prst="roundRect">
             <a:avLst/>
           </a:prstGeom>
           <a:solidFill>
-            <a:srgbClr val="0077B6"/>
+            <a:srgbClr val="1E293B"/>
           </a:solidFill>
           <a:ln>
             <a:noFill/>
@@ -4287,219 +4367,6 @@
       </p:sp>
       <p:sp>
         <p:nvSpPr>
-          <p:cNvPr id="14" name="TextBox 13"/>
-          <p:cNvSpPr txBox="1"/>
-          <p:nvPr/>
-        </p:nvSpPr>
-        <p:spPr>
-          <a:xfrm>
-            <a:off x="8869680" y="1874519"/>
-            <a:ext cx="640080" cy="640080"/>
-          </a:xfrm>
-          <a:prstGeom prst="rect">
-            <a:avLst/>
-          </a:prstGeom>
-          <a:noFill/>
-        </p:spPr>
-        <p:txBody>
-          <a:bodyPr wrap="square"/>
-          <a:lstStyle/>
-          <a:p>
-            <a:pPr algn="ctr">
-              <a:defRPr sz="2200" b="1">
-                <a:solidFill>
-                  <a:srgbClr val="FFFFFF"/>
-                </a:solidFill>
-                <a:latin typeface="Noto Sans JP"/>
-              </a:defRPr>
-            </a:pPr>
-            <a:r>
-              <a:t>3</a:t>
-            </a:r>
-          </a:p>
-        </p:txBody>
-      </p:sp>
-      <p:sp>
-        <p:nvSpPr>
-          <p:cNvPr id="15" name="TextBox 14"/>
-          <p:cNvSpPr txBox="1"/>
-          <p:nvPr/>
-        </p:nvSpPr>
-        <p:spPr>
-          <a:xfrm>
-            <a:off x="8138160" y="2651760"/>
-            <a:ext cx="2103120" cy="457200"/>
-          </a:xfrm>
-          <a:prstGeom prst="rect">
-            <a:avLst/>
-          </a:prstGeom>
-          <a:noFill/>
-        </p:spPr>
-        <p:txBody>
-          <a:bodyPr wrap="square"/>
-          <a:lstStyle/>
-          <a:p>
-            <a:pPr algn="ctr">
-              <a:defRPr sz="2000" b="1">
-                <a:solidFill>
-                  <a:srgbClr val="023E8A"/>
-                </a:solidFill>
-                <a:latin typeface="Noto Sans JP"/>
-              </a:defRPr>
-            </a:pPr>
-            <a:r>
-              <a:t>検証</a:t>
-            </a:r>
-          </a:p>
-        </p:txBody>
-      </p:sp>
-      <p:sp>
-        <p:nvSpPr>
-          <p:cNvPr id="16" name="TextBox 15"/>
-          <p:cNvSpPr txBox="1"/>
-          <p:nvPr/>
-        </p:nvSpPr>
-        <p:spPr>
-          <a:xfrm>
-            <a:off x="8138160" y="3108960"/>
-            <a:ext cx="2103120" cy="1097280"/>
-          </a:xfrm>
-          <a:prstGeom prst="rect">
-            <a:avLst/>
-          </a:prstGeom>
-          <a:noFill/>
-        </p:spPr>
-        <p:txBody>
-          <a:bodyPr wrap="square"/>
-          <a:lstStyle/>
-          <a:p>
-            <a:pPr algn="ctr">
-              <a:defRPr sz="1300" b="0">
-                <a:solidFill>
-                  <a:srgbClr val="64748B"/>
-                </a:solidFill>
-                <a:latin typeface="Noto Sans JP"/>
-              </a:defRPr>
-            </a:pPr>
-            <a:r>
-              <a:t>結果からの検証を記入</a:t>
-            </a:r>
-          </a:p>
-        </p:txBody>
-      </p:sp>
-      <p:sp>
-        <p:nvSpPr>
-          <p:cNvPr id="17" name="TextBox 16"/>
-          <p:cNvSpPr txBox="1"/>
-          <p:nvPr/>
-        </p:nvSpPr>
-        <p:spPr>
-          <a:xfrm>
-            <a:off x="3200400" y="1965960"/>
-            <a:ext cx="457200" cy="457200"/>
-          </a:xfrm>
-          <a:prstGeom prst="rect">
-            <a:avLst/>
-          </a:prstGeom>
-          <a:noFill/>
-        </p:spPr>
-        <p:txBody>
-          <a:bodyPr wrap="square"/>
-          <a:lstStyle/>
-          <a:p>
-            <a:pPr algn="ctr">
-              <a:defRPr sz="2400" b="0">
-                <a:solidFill>
-                  <a:srgbClr val="CBD5E1"/>
-                </a:solidFill>
-                <a:latin typeface="Noto Sans JP"/>
-              </a:defRPr>
-            </a:pPr>
-            <a:r>
-              <a:t>→</a:t>
-            </a:r>
-          </a:p>
-        </p:txBody>
-      </p:sp>
-      <p:sp>
-        <p:nvSpPr>
-          <p:cNvPr id="18" name="TextBox 17"/>
-          <p:cNvSpPr txBox="1"/>
-          <p:nvPr/>
-        </p:nvSpPr>
-        <p:spPr>
-          <a:xfrm>
-            <a:off x="6583680" y="1965960"/>
-            <a:ext cx="457200" cy="457200"/>
-          </a:xfrm>
-          <a:prstGeom prst="rect">
-            <a:avLst/>
-          </a:prstGeom>
-          <a:noFill/>
-        </p:spPr>
-        <p:txBody>
-          <a:bodyPr wrap="square"/>
-          <a:lstStyle/>
-          <a:p>
-            <a:pPr algn="ctr">
-              <a:defRPr sz="2400" b="0">
-                <a:solidFill>
-                  <a:srgbClr val="CBD5E1"/>
-                </a:solidFill>
-                <a:latin typeface="Noto Sans JP"/>
-              </a:defRPr>
-            </a:pPr>
-            <a:r>
-              <a:t>→</a:t>
-            </a:r>
-          </a:p>
-        </p:txBody>
-      </p:sp>
-      <p:sp>
-        <p:nvSpPr>
-          <p:cNvPr id="19" name="Rounded Rectangle 18"/>
-          <p:cNvSpPr/>
-          <p:nvPr/>
-        </p:nvSpPr>
-        <p:spPr>
-          <a:xfrm>
-            <a:off x="731520" y="4572000"/>
-            <a:ext cx="10698480" cy="1828800"/>
-          </a:xfrm>
-          <a:prstGeom prst="roundRect">
-            <a:avLst/>
-          </a:prstGeom>
-          <a:solidFill>
-            <a:srgbClr val="1E293B"/>
-          </a:solidFill>
-          <a:ln>
-            <a:noFill/>
-          </a:ln>
-        </p:spPr>
-        <p:style>
-          <a:lnRef idx="1">
-            <a:schemeClr val="accent1"/>
-          </a:lnRef>
-          <a:fillRef idx="3">
-            <a:schemeClr val="accent1"/>
-          </a:fillRef>
-          <a:effectRef idx="2">
-            <a:schemeClr val="accent1"/>
-          </a:effectRef>
-          <a:fontRef idx="minor">
-            <a:schemeClr val="lt1"/>
-          </a:fontRef>
-        </p:style>
-        <p:txBody>
-          <a:bodyPr rtlCol="0" anchor="ctr"/>
-          <a:lstStyle/>
-          <a:p>
-            <a:pPr algn="ctr"/>
-          </a:p>
-        </p:txBody>
-      </p:sp>
-      <p:sp>
-        <p:nvSpPr>
           <p:cNvPr id="20" name="TextBox 19"/>
           <p:cNvSpPr txBox="1"/>
           <p:nvPr/>
@@ -4587,57 +4454,14 @@
       </p:sp>
       <p:sp>
         <p:nvSpPr>
-          <p:cNvPr id="21" name="Rectangle 20"/>
-          <p:cNvSpPr/>
-          <p:nvPr/>
-        </p:nvSpPr>
-        <p:spPr>
-          <a:xfrm>
-            <a:off x="0" y="6492240"/>
-            <a:ext cx="12191695" cy="18288"/>
-          </a:xfrm>
-          <a:prstGeom prst="rect">
-            <a:avLst/>
-          </a:prstGeom>
-          <a:solidFill>
-            <a:srgbClr val="E2E8F0"/>
-          </a:solidFill>
-          <a:ln>
-            <a:noFill/>
-          </a:ln>
-        </p:spPr>
-        <p:style>
-          <a:lnRef idx="1">
-            <a:schemeClr val="accent1"/>
-          </a:lnRef>
-          <a:fillRef idx="3">
-            <a:schemeClr val="accent1"/>
-          </a:fillRef>
-          <a:effectRef idx="2">
-            <a:schemeClr val="accent1"/>
-          </a:effectRef>
-          <a:fontRef idx="minor">
-            <a:schemeClr val="lt1"/>
-          </a:fontRef>
-        </p:style>
-        <p:txBody>
-          <a:bodyPr rtlCol="0" anchor="ctr"/>
-          <a:lstStyle/>
-          <a:p>
-            <a:pPr algn="ctr"/>
-          </a:p>
-        </p:txBody>
-      </p:sp>
-      <p:sp>
-        <p:nvSpPr>
-          <p:cNvPr id="22" name="TextBox 21"/>
+          <p:cNvPr id="21" name="TextBox 20"/>
           <p:cNvSpPr txBox="1"/>
           <p:nvPr/>
         </p:nvSpPr>
         <p:spPr>
           <a:xfrm>
-            <a:off x="457200" y="6537960"/>
-            <a:ext cx="7315200" cy="274320"/>
+            <a:off x="10972800" y="6492240"/>
+            <a:ext cx="914400" cy="274320"/>
           </a:xfrm>
           <a:prstGeom prst="rect">
             <a:avLst/>
@@ -4645,41 +4469,9 @@
           <a:noFill/>
         </p:spPr>
         <p:txBody>
-          <a:bodyPr wrap="square"/>
-          <a:lstStyle/>
-          <a:p>
-            <a:pPr algn="l">
-              <a:defRPr sz="900" b="0">
-                <a:solidFill>
-                  <a:srgbClr val="94A3B8"/>
-                </a:solidFill>
-                <a:latin typeface="Noto Sans JP"/>
-              </a:defRPr>
-            </a:pPr>
-            <a:r>
-              <a:t>データで考える、沖縄の「ちょうどいい」と「もっといい」</a:t>
-            </a:r>
-          </a:p>
-        </p:txBody>
-      </p:sp>
-      <p:sp>
-        <p:nvSpPr>
-          <p:cNvPr id="23" name="TextBox 22"/>
-          <p:cNvSpPr txBox="1"/>
-          <p:nvPr/>
-        </p:nvSpPr>
-        <p:spPr>
-          <a:xfrm>
-            <a:off x="10972800" y="6537960"/>
-            <a:ext cx="914400" cy="274320"/>
-          </a:xfrm>
-          <a:prstGeom prst="rect">
-            <a:avLst/>
-          </a:prstGeom>
-          <a:noFill/>
-        </p:spPr>
-        <p:txBody>
-          <a:bodyPr wrap="square"/>
+          <a:bodyPr wrap="square">
+            <a:spAutoFit/>
+          </a:bodyPr>
           <a:lstStyle/>
           <a:p>
             <a:pPr algn="r">
@@ -4714,22 +4506,118 @@
         <p:nvPr/>
       </p:nvGrpSpPr>
       <p:grpSpPr/>
-      <p:sp>
-        <p:nvSpPr>
-          <p:cNvPr id="2" name="Rectangle 1"/>
+      <p:pic>
+        <p:nvPicPr>
+          <p:cNvPr id="2" name="Picture 1" descr="bg.png"/>
+          <p:cNvPicPr>
+            <a:picLocks noChangeAspect="1"/>
+          </p:cNvPicPr>
+          <p:nvPr/>
+        </p:nvPicPr>
+        <p:blipFill>
+          <a:blip r:embed="rId2"/>
+          <a:stretch>
+            <a:fillRect/>
+          </a:stretch>
+        </p:blipFill>
+        <p:spPr>
+          <a:xfrm>
+            <a:off x="0" y="0"/>
+            <a:ext cx="12191695" cy="6858000"/>
+          </a:xfrm>
+          <a:prstGeom prst="rect">
+            <a:avLst/>
+          </a:prstGeom>
+        </p:spPr>
+      </p:pic>
+      <p:sp>
+        <p:nvSpPr>
+          <p:cNvPr id="3" name="TextBox 2"/>
+          <p:cNvSpPr txBox="1"/>
+          <p:nvPr/>
+        </p:nvSpPr>
+        <p:spPr>
+          <a:xfrm>
+            <a:off x="731520" y="457200"/>
+            <a:ext cx="2743200" cy="274320"/>
+          </a:xfrm>
+          <a:prstGeom prst="rect">
+            <a:avLst/>
+          </a:prstGeom>
+          <a:noFill/>
+        </p:spPr>
+        <p:txBody>
+          <a:bodyPr wrap="square">
+            <a:spAutoFit/>
+          </a:bodyPr>
+          <a:lstStyle/>
+          <a:p>
+            <a:pPr algn="l">
+              <a:defRPr sz="1100" b="1">
+                <a:solidFill>
+                  <a:srgbClr val="0077B6"/>
+                </a:solidFill>
+                <a:latin typeface="Noto Sans JP"/>
+              </a:defRPr>
+            </a:pPr>
+            <a:r>
+              <a:t>FINDINGS</a:t>
+            </a:r>
+          </a:p>
+        </p:txBody>
+      </p:sp>
+      <p:sp>
+        <p:nvSpPr>
+          <p:cNvPr id="4" name="TextBox 3"/>
+          <p:cNvSpPr txBox="1"/>
+          <p:nvPr/>
+        </p:nvSpPr>
+        <p:spPr>
+          <a:xfrm>
+            <a:off x="731520" y="822960"/>
+            <a:ext cx="5486400" cy="640080"/>
+          </a:xfrm>
+          <a:prstGeom prst="rect">
+            <a:avLst/>
+          </a:prstGeom>
+          <a:noFill/>
+        </p:spPr>
+        <p:txBody>
+          <a:bodyPr wrap="square">
+            <a:spAutoFit/>
+          </a:bodyPr>
+          <a:lstStyle/>
+          <a:p>
+            <a:pPr algn="l">
+              <a:defRPr sz="3200" b="1">
+                <a:solidFill>
+                  <a:srgbClr val="023E8A"/>
+                </a:solidFill>
+                <a:latin typeface="Noto Sans JP"/>
+              </a:defRPr>
+            </a:pPr>
+            <a:r>
+              <a:t>発見したこと</a:t>
+            </a:r>
+          </a:p>
+        </p:txBody>
+      </p:sp>
+      <p:sp>
+        <p:nvSpPr>
+          <p:cNvPr id="5" name="Rounded Rectangle 4"/>
           <p:cNvSpPr/>
           <p:nvPr/>
         </p:nvSpPr>
         <p:spPr>
           <a:xfrm>
-            <a:off x="0" y="0"/>
-            <a:ext cx="12191695" cy="73152"/>
-          </a:xfrm>
-          <a:prstGeom prst="rect">
+            <a:off x="731520" y="1645920"/>
+            <a:ext cx="5303520" cy="1188720"/>
+          </a:xfrm>
+          <a:prstGeom prst="roundRect">
             <a:avLst/>
           </a:prstGeom>
           <a:solidFill>
-            <a:srgbClr val="0077B6"/>
+            <a:srgbClr val="FFF5F5"/>
           </a:solidFill>
           <a:ln>
             <a:noFill/>
@@ -4759,88 +4647,20 @@
       </p:sp>
       <p:sp>
         <p:nvSpPr>
-          <p:cNvPr id="3" name="TextBox 2"/>
-          <p:cNvSpPr txBox="1"/>
-          <p:nvPr/>
-        </p:nvSpPr>
-        <p:spPr>
-          <a:xfrm>
-            <a:off x="731520" y="365760"/>
-            <a:ext cx="2743200" cy="274320"/>
-          </a:xfrm>
-          <a:prstGeom prst="rect">
-            <a:avLst/>
-          </a:prstGeom>
-          <a:noFill/>
-        </p:spPr>
-        <p:txBody>
-          <a:bodyPr wrap="square"/>
-          <a:lstStyle/>
-          <a:p>
-            <a:pPr algn="l">
-              <a:defRPr sz="1100" b="1">
-                <a:solidFill>
-                  <a:srgbClr val="0077B6"/>
-                </a:solidFill>
-                <a:latin typeface="Noto Sans JP"/>
-              </a:defRPr>
-            </a:pPr>
-            <a:r>
-              <a:t>FINDINGS</a:t>
-            </a:r>
-          </a:p>
-        </p:txBody>
-      </p:sp>
-      <p:sp>
-        <p:nvSpPr>
-          <p:cNvPr id="4" name="TextBox 3"/>
-          <p:cNvSpPr txBox="1"/>
-          <p:nvPr/>
-        </p:nvSpPr>
-        <p:spPr>
-          <a:xfrm>
-            <a:off x="731520" y="731520"/>
-            <a:ext cx="5486400" cy="640080"/>
-          </a:xfrm>
-          <a:prstGeom prst="rect">
-            <a:avLst/>
-          </a:prstGeom>
-          <a:noFill/>
-        </p:spPr>
-        <p:txBody>
-          <a:bodyPr wrap="square"/>
-          <a:lstStyle/>
-          <a:p>
-            <a:pPr algn="l">
-              <a:defRPr sz="3200" b="1">
-                <a:solidFill>
-                  <a:srgbClr val="023E8A"/>
-                </a:solidFill>
-                <a:latin typeface="Noto Sans JP"/>
-              </a:defRPr>
-            </a:pPr>
-            <a:r>
-              <a:t>発見したこと</a:t>
-            </a:r>
-          </a:p>
-        </p:txBody>
-      </p:sp>
-      <p:sp>
-        <p:nvSpPr>
-          <p:cNvPr id="5" name="Rounded Rectangle 4"/>
+          <p:cNvPr id="6" name="Rectangle 5"/>
           <p:cNvSpPr/>
           <p:nvPr/>
         </p:nvSpPr>
         <p:spPr>
           <a:xfrm>
             <a:off x="731520" y="1645920"/>
-            <a:ext cx="5303520" cy="1188720"/>
-          </a:xfrm>
-          <a:prstGeom prst="roundRect">
+            <a:ext cx="54864" cy="1188720"/>
+          </a:xfrm>
+          <a:prstGeom prst="rect">
             <a:avLst/>
           </a:prstGeom>
           <a:solidFill>
-            <a:srgbClr val="FFF5F5"/>
+            <a:srgbClr val="E63946"/>
           </a:solidFill>
           <a:ln>
             <a:noFill/>
@@ -4870,20 +4690,92 @@
       </p:sp>
       <p:sp>
         <p:nvSpPr>
-          <p:cNvPr id="6" name="Rectangle 5"/>
+          <p:cNvPr id="7" name="TextBox 6"/>
+          <p:cNvSpPr txBox="1"/>
+          <p:nvPr/>
+        </p:nvSpPr>
+        <p:spPr>
+          <a:xfrm>
+            <a:off x="1097280" y="1783080"/>
+            <a:ext cx="4572000" cy="365760"/>
+          </a:xfrm>
+          <a:prstGeom prst="rect">
+            <a:avLst/>
+          </a:prstGeom>
+          <a:noFill/>
+        </p:spPr>
+        <p:txBody>
+          <a:bodyPr wrap="square">
+            <a:spAutoFit/>
+          </a:bodyPr>
+          <a:lstStyle/>
+          <a:p>
+            <a:pPr algn="l">
+              <a:defRPr sz="1700" b="1">
+                <a:solidFill>
+                  <a:srgbClr val="023E8A"/>
+                </a:solidFill>
+                <a:latin typeface="Noto Sans JP"/>
+              </a:defRPr>
+            </a:pPr>
+            <a:r>
+              <a:t>発見 1</a:t>
+            </a:r>
+          </a:p>
+        </p:txBody>
+      </p:sp>
+      <p:sp>
+        <p:nvSpPr>
+          <p:cNvPr id="8" name="TextBox 7"/>
+          <p:cNvSpPr txBox="1"/>
+          <p:nvPr/>
+        </p:nvSpPr>
+        <p:spPr>
+          <a:xfrm>
+            <a:off x="1097280" y="2194560"/>
+            <a:ext cx="4572000" cy="457200"/>
+          </a:xfrm>
+          <a:prstGeom prst="rect">
+            <a:avLst/>
+          </a:prstGeom>
+          <a:noFill/>
+        </p:spPr>
+        <p:txBody>
+          <a:bodyPr wrap="square">
+            <a:spAutoFit/>
+          </a:bodyPr>
+          <a:lstStyle/>
+          <a:p>
+            <a:pPr algn="l">
+              <a:defRPr sz="1400" b="0">
+                <a:solidFill>
+                  <a:srgbClr val="64748B"/>
+                </a:solidFill>
+                <a:latin typeface="Noto Sans JP"/>
+              </a:defRPr>
+            </a:pPr>
+            <a:r>
+              <a:t>ここに発見を記入</a:t>
+            </a:r>
+          </a:p>
+        </p:txBody>
+      </p:sp>
+      <p:sp>
+        <p:nvSpPr>
+          <p:cNvPr id="9" name="Rounded Rectangle 8"/>
           <p:cNvSpPr/>
           <p:nvPr/>
         </p:nvSpPr>
         <p:spPr>
           <a:xfrm>
-            <a:off x="731520" y="1645920"/>
-            <a:ext cx="54864" cy="1188720"/>
-          </a:xfrm>
-          <a:prstGeom prst="rect">
+            <a:off x="731520" y="3108960"/>
+            <a:ext cx="5303520" cy="1188720"/>
+          </a:xfrm>
+          <a:prstGeom prst="roundRect">
             <a:avLst/>
           </a:prstGeom>
           <a:solidFill>
-            <a:srgbClr val="E63946"/>
+            <a:srgbClr val="F0FFF4"/>
           </a:solidFill>
           <a:ln>
             <a:noFill/>
@@ -4913,88 +4805,20 @@
       </p:sp>
       <p:sp>
         <p:nvSpPr>
-          <p:cNvPr id="7" name="TextBox 6"/>
-          <p:cNvSpPr txBox="1"/>
-          <p:nvPr/>
-        </p:nvSpPr>
-        <p:spPr>
-          <a:xfrm>
-            <a:off x="1097280" y="1783080"/>
-            <a:ext cx="4572000" cy="365760"/>
-          </a:xfrm>
-          <a:prstGeom prst="rect">
-            <a:avLst/>
-          </a:prstGeom>
-          <a:noFill/>
-        </p:spPr>
-        <p:txBody>
-          <a:bodyPr wrap="square"/>
-          <a:lstStyle/>
-          <a:p>
-            <a:pPr algn="l">
-              <a:defRPr sz="1700" b="1">
-                <a:solidFill>
-                  <a:srgbClr val="023E8A"/>
-                </a:solidFill>
-                <a:latin typeface="Noto Sans JP"/>
-              </a:defRPr>
-            </a:pPr>
-            <a:r>
-              <a:t>発見 1</a:t>
-            </a:r>
-          </a:p>
-        </p:txBody>
-      </p:sp>
-      <p:sp>
-        <p:nvSpPr>
-          <p:cNvPr id="8" name="TextBox 7"/>
-          <p:cNvSpPr txBox="1"/>
-          <p:nvPr/>
-        </p:nvSpPr>
-        <p:spPr>
-          <a:xfrm>
-            <a:off x="1097280" y="2194560"/>
-            <a:ext cx="4572000" cy="457200"/>
-          </a:xfrm>
-          <a:prstGeom prst="rect">
-            <a:avLst/>
-          </a:prstGeom>
-          <a:noFill/>
-        </p:spPr>
-        <p:txBody>
-          <a:bodyPr wrap="square"/>
-          <a:lstStyle/>
-          <a:p>
-            <a:pPr algn="l">
-              <a:defRPr sz="1400" b="0">
-                <a:solidFill>
-                  <a:srgbClr val="64748B"/>
-                </a:solidFill>
-                <a:latin typeface="Noto Sans JP"/>
-              </a:defRPr>
-            </a:pPr>
-            <a:r>
-              <a:t>ここに発見を記入</a:t>
-            </a:r>
-          </a:p>
-        </p:txBody>
-      </p:sp>
-      <p:sp>
-        <p:nvSpPr>
-          <p:cNvPr id="9" name="Rounded Rectangle 8"/>
+          <p:cNvPr id="10" name="Rectangle 9"/>
           <p:cNvSpPr/>
           <p:nvPr/>
         </p:nvSpPr>
         <p:spPr>
           <a:xfrm>
             <a:off x="731520" y="3108960"/>
-            <a:ext cx="5303520" cy="1188720"/>
-          </a:xfrm>
-          <a:prstGeom prst="roundRect">
+            <a:ext cx="54864" cy="1188720"/>
+          </a:xfrm>
+          <a:prstGeom prst="rect">
             <a:avLst/>
           </a:prstGeom>
           <a:solidFill>
-            <a:srgbClr val="F0FFF4"/>
+            <a:srgbClr val="2A9D8F"/>
           </a:solidFill>
           <a:ln>
             <a:noFill/>
@@ -5024,20 +4848,92 @@
       </p:sp>
       <p:sp>
         <p:nvSpPr>
-          <p:cNvPr id="10" name="Rectangle 9"/>
+          <p:cNvPr id="11" name="TextBox 10"/>
+          <p:cNvSpPr txBox="1"/>
+          <p:nvPr/>
+        </p:nvSpPr>
+        <p:spPr>
+          <a:xfrm>
+            <a:off x="1097280" y="3246120"/>
+            <a:ext cx="4572000" cy="365760"/>
+          </a:xfrm>
+          <a:prstGeom prst="rect">
+            <a:avLst/>
+          </a:prstGeom>
+          <a:noFill/>
+        </p:spPr>
+        <p:txBody>
+          <a:bodyPr wrap="square">
+            <a:spAutoFit/>
+          </a:bodyPr>
+          <a:lstStyle/>
+          <a:p>
+            <a:pPr algn="l">
+              <a:defRPr sz="1700" b="1">
+                <a:solidFill>
+                  <a:srgbClr val="023E8A"/>
+                </a:solidFill>
+                <a:latin typeface="Noto Sans JP"/>
+              </a:defRPr>
+            </a:pPr>
+            <a:r>
+              <a:t>発見 2</a:t>
+            </a:r>
+          </a:p>
+        </p:txBody>
+      </p:sp>
+      <p:sp>
+        <p:nvSpPr>
+          <p:cNvPr id="12" name="TextBox 11"/>
+          <p:cNvSpPr txBox="1"/>
+          <p:nvPr/>
+        </p:nvSpPr>
+        <p:spPr>
+          <a:xfrm>
+            <a:off x="1097280" y="3657600"/>
+            <a:ext cx="4572000" cy="457200"/>
+          </a:xfrm>
+          <a:prstGeom prst="rect">
+            <a:avLst/>
+          </a:prstGeom>
+          <a:noFill/>
+        </p:spPr>
+        <p:txBody>
+          <a:bodyPr wrap="square">
+            <a:spAutoFit/>
+          </a:bodyPr>
+          <a:lstStyle/>
+          <a:p>
+            <a:pPr algn="l">
+              <a:defRPr sz="1400" b="0">
+                <a:solidFill>
+                  <a:srgbClr val="64748B"/>
+                </a:solidFill>
+                <a:latin typeface="Noto Sans JP"/>
+              </a:defRPr>
+            </a:pPr>
+            <a:r>
+              <a:t>ここに発見を記入</a:t>
+            </a:r>
+          </a:p>
+        </p:txBody>
+      </p:sp>
+      <p:sp>
+        <p:nvSpPr>
+          <p:cNvPr id="13" name="Rounded Rectangle 12"/>
           <p:cNvSpPr/>
           <p:nvPr/>
         </p:nvSpPr>
         <p:spPr>
           <a:xfrm>
-            <a:off x="731520" y="3108960"/>
-            <a:ext cx="54864" cy="1188720"/>
-          </a:xfrm>
-          <a:prstGeom prst="rect">
+            <a:off x="731520" y="4572000"/>
+            <a:ext cx="5303520" cy="1188720"/>
+          </a:xfrm>
+          <a:prstGeom prst="roundRect">
             <a:avLst/>
           </a:prstGeom>
           <a:solidFill>
-            <a:srgbClr val="2A9D8F"/>
+            <a:srgbClr val="FFFAF0"/>
           </a:solidFill>
           <a:ln>
             <a:noFill/>
@@ -5067,88 +4963,20 @@
       </p:sp>
       <p:sp>
         <p:nvSpPr>
-          <p:cNvPr id="11" name="TextBox 10"/>
-          <p:cNvSpPr txBox="1"/>
-          <p:nvPr/>
-        </p:nvSpPr>
-        <p:spPr>
-          <a:xfrm>
-            <a:off x="1097280" y="3246120"/>
-            <a:ext cx="4572000" cy="365760"/>
-          </a:xfrm>
-          <a:prstGeom prst="rect">
-            <a:avLst/>
-          </a:prstGeom>
-          <a:noFill/>
-        </p:spPr>
-        <p:txBody>
-          <a:bodyPr wrap="square"/>
-          <a:lstStyle/>
-          <a:p>
-            <a:pPr algn="l">
-              <a:defRPr sz="1700" b="1">
-                <a:solidFill>
-                  <a:srgbClr val="023E8A"/>
-                </a:solidFill>
-                <a:latin typeface="Noto Sans JP"/>
-              </a:defRPr>
-            </a:pPr>
-            <a:r>
-              <a:t>発見 2</a:t>
-            </a:r>
-          </a:p>
-        </p:txBody>
-      </p:sp>
-      <p:sp>
-        <p:nvSpPr>
-          <p:cNvPr id="12" name="TextBox 11"/>
-          <p:cNvSpPr txBox="1"/>
-          <p:nvPr/>
-        </p:nvSpPr>
-        <p:spPr>
-          <a:xfrm>
-            <a:off x="1097280" y="3657600"/>
-            <a:ext cx="4572000" cy="457200"/>
-          </a:xfrm>
-          <a:prstGeom prst="rect">
-            <a:avLst/>
-          </a:prstGeom>
-          <a:noFill/>
-        </p:spPr>
-        <p:txBody>
-          <a:bodyPr wrap="square"/>
-          <a:lstStyle/>
-          <a:p>
-            <a:pPr algn="l">
-              <a:defRPr sz="1400" b="0">
-                <a:solidFill>
-                  <a:srgbClr val="64748B"/>
-                </a:solidFill>
-                <a:latin typeface="Noto Sans JP"/>
-              </a:defRPr>
-            </a:pPr>
-            <a:r>
-              <a:t>ここに発見を記入</a:t>
-            </a:r>
-          </a:p>
-        </p:txBody>
-      </p:sp>
-      <p:sp>
-        <p:nvSpPr>
-          <p:cNvPr id="13" name="Rounded Rectangle 12"/>
+          <p:cNvPr id="14" name="Rectangle 13"/>
           <p:cNvSpPr/>
           <p:nvPr/>
         </p:nvSpPr>
         <p:spPr>
           <a:xfrm>
             <a:off x="731520" y="4572000"/>
-            <a:ext cx="5303520" cy="1188720"/>
-          </a:xfrm>
-          <a:prstGeom prst="roundRect">
+            <a:ext cx="54864" cy="1188720"/>
+          </a:xfrm>
+          <a:prstGeom prst="rect">
             <a:avLst/>
           </a:prstGeom>
           <a:solidFill>
-            <a:srgbClr val="FFFAF0"/>
+            <a:srgbClr val="F4A261"/>
           </a:solidFill>
           <a:ln>
             <a:noFill/>
@@ -5178,23 +5006,95 @@
       </p:sp>
       <p:sp>
         <p:nvSpPr>
-          <p:cNvPr id="14" name="Rectangle 13"/>
+          <p:cNvPr id="15" name="TextBox 14"/>
+          <p:cNvSpPr txBox="1"/>
+          <p:nvPr/>
+        </p:nvSpPr>
+        <p:spPr>
+          <a:xfrm>
+            <a:off x="1097280" y="4709160"/>
+            <a:ext cx="4572000" cy="365760"/>
+          </a:xfrm>
+          <a:prstGeom prst="rect">
+            <a:avLst/>
+          </a:prstGeom>
+          <a:noFill/>
+        </p:spPr>
+        <p:txBody>
+          <a:bodyPr wrap="square">
+            <a:spAutoFit/>
+          </a:bodyPr>
+          <a:lstStyle/>
+          <a:p>
+            <a:pPr algn="l">
+              <a:defRPr sz="1700" b="1">
+                <a:solidFill>
+                  <a:srgbClr val="023E8A"/>
+                </a:solidFill>
+                <a:latin typeface="Noto Sans JP"/>
+              </a:defRPr>
+            </a:pPr>
+            <a:r>
+              <a:t>発見 3</a:t>
+            </a:r>
+          </a:p>
+        </p:txBody>
+      </p:sp>
+      <p:sp>
+        <p:nvSpPr>
+          <p:cNvPr id="16" name="TextBox 15"/>
+          <p:cNvSpPr txBox="1"/>
+          <p:nvPr/>
+        </p:nvSpPr>
+        <p:spPr>
+          <a:xfrm>
+            <a:off x="1097280" y="5120640"/>
+            <a:ext cx="4572000" cy="457200"/>
+          </a:xfrm>
+          <a:prstGeom prst="rect">
+            <a:avLst/>
+          </a:prstGeom>
+          <a:noFill/>
+        </p:spPr>
+        <p:txBody>
+          <a:bodyPr wrap="square">
+            <a:spAutoFit/>
+          </a:bodyPr>
+          <a:lstStyle/>
+          <a:p>
+            <a:pPr algn="l">
+              <a:defRPr sz="1400" b="0">
+                <a:solidFill>
+                  <a:srgbClr val="64748B"/>
+                </a:solidFill>
+                <a:latin typeface="Noto Sans JP"/>
+              </a:defRPr>
+            </a:pPr>
+            <a:r>
+              <a:t>ここに発見を記入</a:t>
+            </a:r>
+          </a:p>
+        </p:txBody>
+      </p:sp>
+      <p:sp>
+        <p:nvSpPr>
+          <p:cNvPr id="17" name="Rectangle 16"/>
           <p:cNvSpPr/>
           <p:nvPr/>
         </p:nvSpPr>
         <p:spPr>
           <a:xfrm>
-            <a:off x="731520" y="4572000"/>
-            <a:ext cx="54864" cy="1188720"/>
-          </a:xfrm>
-          <a:prstGeom prst="rect">
-            <a:avLst/>
-          </a:prstGeom>
-          <a:solidFill>
-            <a:srgbClr val="F4A261"/>
-          </a:solidFill>
-          <a:ln>
-            <a:noFill/>
+            <a:off x="6583680" y="1645920"/>
+            <a:ext cx="4846320" cy="4389120"/>
+          </a:xfrm>
+          <a:prstGeom prst="rect">
+            <a:avLst/>
+          </a:prstGeom>
+          <a:noFill/>
+          <a:ln w="25400">
+            <a:solidFill>
+              <a:srgbClr val="CBD5E1"/>
+            </a:solidFill>
           </a:ln>
         </p:spPr>
         <p:style>
@@ -5221,117 +5121,6 @@
       </p:sp>
       <p:sp>
         <p:nvSpPr>
-          <p:cNvPr id="15" name="TextBox 14"/>
-          <p:cNvSpPr txBox="1"/>
-          <p:nvPr/>
-        </p:nvSpPr>
-        <p:spPr>
-          <a:xfrm>
-            <a:off x="1097280" y="4709160"/>
-            <a:ext cx="4572000" cy="365760"/>
-          </a:xfrm>
-          <a:prstGeom prst="rect">
-            <a:avLst/>
-          </a:prstGeom>
-          <a:noFill/>
-        </p:spPr>
-        <p:txBody>
-          <a:bodyPr wrap="square"/>
-          <a:lstStyle/>
-          <a:p>
-            <a:pPr algn="l">
-              <a:defRPr sz="1700" b="1">
-                <a:solidFill>
-                  <a:srgbClr val="023E8A"/>
-                </a:solidFill>
-                <a:latin typeface="Noto Sans JP"/>
-              </a:defRPr>
-            </a:pPr>
-            <a:r>
-              <a:t>発見 3</a:t>
-            </a:r>
-          </a:p>
-        </p:txBody>
-      </p:sp>
-      <p:sp>
-        <p:nvSpPr>
-          <p:cNvPr id="16" name="TextBox 15"/>
-          <p:cNvSpPr txBox="1"/>
-          <p:nvPr/>
-        </p:nvSpPr>
-        <p:spPr>
-          <a:xfrm>
-            <a:off x="1097280" y="5120640"/>
-            <a:ext cx="4572000" cy="457200"/>
-          </a:xfrm>
-          <a:prstGeom prst="rect">
-            <a:avLst/>
-          </a:prstGeom>
-          <a:noFill/>
-        </p:spPr>
-        <p:txBody>
-          <a:bodyPr wrap="square"/>
-          <a:lstStyle/>
-          <a:p>
-            <a:pPr algn="l">
-              <a:defRPr sz="1400" b="0">
-                <a:solidFill>
-                  <a:srgbClr val="64748B"/>
-                </a:solidFill>
-                <a:latin typeface="Noto Sans JP"/>
-              </a:defRPr>
-            </a:pPr>
-            <a:r>
-              <a:t>ここに発見を記入</a:t>
-            </a:r>
-          </a:p>
-        </p:txBody>
-      </p:sp>
-      <p:sp>
-        <p:nvSpPr>
-          <p:cNvPr id="17" name="Rectangle 16"/>
-          <p:cNvSpPr/>
-          <p:nvPr/>
-        </p:nvSpPr>
-        <p:spPr>
-          <a:xfrm>
-            <a:off x="6583680" y="1645920"/>
-            <a:ext cx="4846320" cy="4389120"/>
-          </a:xfrm>
-          <a:prstGeom prst="rect">
-            <a:avLst/>
-          </a:prstGeom>
-          <a:noFill/>
-          <a:ln w="25400" dash="lgDash">
-            <a:solidFill>
-              <a:srgbClr val="CBD5E1"/>
-            </a:solidFill>
-          </a:ln>
-        </p:spPr>
-        <p:style>
-          <a:lnRef idx="1">
-            <a:schemeClr val="accent1"/>
-          </a:lnRef>
-          <a:fillRef idx="3">
-            <a:schemeClr val="accent1"/>
-          </a:fillRef>
-          <a:effectRef idx="2">
-            <a:schemeClr val="accent1"/>
-          </a:effectRef>
-          <a:fontRef idx="minor">
-            <a:schemeClr val="lt1"/>
-          </a:fontRef>
-        </p:style>
-        <p:txBody>
-          <a:bodyPr rtlCol="0" anchor="ctr"/>
-          <a:lstStyle/>
-          <a:p>
-            <a:pPr algn="ctr"/>
-          </a:p>
-        </p:txBody>
-      </p:sp>
-      <p:sp>
-        <p:nvSpPr>
           <p:cNvPr id="18" name="TextBox 17"/>
           <p:cNvSpPr txBox="1"/>
           <p:nvPr/>
@@ -5432,57 +5221,14 @@
       </p:sp>
       <p:sp>
         <p:nvSpPr>
-          <p:cNvPr id="19" name="Rectangle 18"/>
-          <p:cNvSpPr/>
-          <p:nvPr/>
-        </p:nvSpPr>
-        <p:spPr>
-          <a:xfrm>
-            <a:off x="0" y="6492240"/>
-            <a:ext cx="12191695" cy="18288"/>
-          </a:xfrm>
-          <a:prstGeom prst="rect">
-            <a:avLst/>
-          </a:prstGeom>
-          <a:solidFill>
-            <a:srgbClr val="E2E8F0"/>
-          </a:solidFill>
-          <a:ln>
-            <a:noFill/>
-          </a:ln>
-        </p:spPr>
-        <p:style>
-          <a:lnRef idx="1">
-            <a:schemeClr val="accent1"/>
-          </a:lnRef>
-          <a:fillRef idx="3">
-            <a:schemeClr val="accent1"/>
-          </a:fillRef>
-          <a:effectRef idx="2">
-            <a:schemeClr val="accent1"/>
-          </a:effectRef>
-          <a:fontRef idx="minor">
-            <a:schemeClr val="lt1"/>
-          </a:fontRef>
-        </p:style>
-        <p:txBody>
-          <a:bodyPr rtlCol="0" anchor="ctr"/>
-          <a:lstStyle/>
-          <a:p>
-            <a:pPr algn="ctr"/>
-          </a:p>
-        </p:txBody>
-      </p:sp>
-      <p:sp>
-        <p:nvSpPr>
-          <p:cNvPr id="20" name="TextBox 19"/>
+          <p:cNvPr id="19" name="TextBox 18"/>
           <p:cNvSpPr txBox="1"/>
           <p:nvPr/>
         </p:nvSpPr>
         <p:spPr>
           <a:xfrm>
-            <a:off x="457200" y="6537960"/>
-            <a:ext cx="7315200" cy="274320"/>
+            <a:off x="10972800" y="6492240"/>
+            <a:ext cx="914400" cy="274320"/>
           </a:xfrm>
           <a:prstGeom prst="rect">
             <a:avLst/>
@@ -5490,41 +5236,9 @@
           <a:noFill/>
         </p:spPr>
         <p:txBody>
-          <a:bodyPr wrap="square"/>
-          <a:lstStyle/>
-          <a:p>
-            <a:pPr algn="l">
-              <a:defRPr sz="900" b="0">
-                <a:solidFill>
-                  <a:srgbClr val="94A3B8"/>
-                </a:solidFill>
-                <a:latin typeface="Noto Sans JP"/>
-              </a:defRPr>
-            </a:pPr>
-            <a:r>
-              <a:t>データで考える、沖縄の「ちょうどいい」と「もっといい」</a:t>
-            </a:r>
-          </a:p>
-        </p:txBody>
-      </p:sp>
-      <p:sp>
-        <p:nvSpPr>
-          <p:cNvPr id="21" name="TextBox 20"/>
-          <p:cNvSpPr txBox="1"/>
-          <p:nvPr/>
-        </p:nvSpPr>
-        <p:spPr>
-          <a:xfrm>
-            <a:off x="10972800" y="6537960"/>
-            <a:ext cx="914400" cy="274320"/>
-          </a:xfrm>
-          <a:prstGeom prst="rect">
-            <a:avLst/>
-          </a:prstGeom>
-          <a:noFill/>
-        </p:spPr>
-        <p:txBody>
-          <a:bodyPr wrap="square"/>
+          <a:bodyPr wrap="square">
+            <a:spAutoFit/>
+          </a:bodyPr>
           <a:lstStyle/>
           <a:p>
             <a:pPr algn="r">
@@ -5559,22 +5273,225 @@
         <p:nvPr/>
       </p:nvGrpSpPr>
       <p:grpSpPr/>
-      <p:sp>
-        <p:nvSpPr>
-          <p:cNvPr id="2" name="Rectangle 1"/>
+      <p:pic>
+        <p:nvPicPr>
+          <p:cNvPr id="2" name="Picture 1" descr="bg.png"/>
+          <p:cNvPicPr>
+            <a:picLocks noChangeAspect="1"/>
+          </p:cNvPicPr>
+          <p:nvPr/>
+        </p:nvPicPr>
+        <p:blipFill>
+          <a:blip r:embed="rId2"/>
+          <a:stretch>
+            <a:fillRect/>
+          </a:stretch>
+        </p:blipFill>
+        <p:spPr>
+          <a:xfrm>
+            <a:off x="0" y="0"/>
+            <a:ext cx="12191695" cy="6858000"/>
+          </a:xfrm>
+          <a:prstGeom prst="rect">
+            <a:avLst/>
+          </a:prstGeom>
+        </p:spPr>
+      </p:pic>
+      <p:sp>
+        <p:nvSpPr>
+          <p:cNvPr id="3" name="TextBox 2"/>
+          <p:cNvSpPr txBox="1"/>
+          <p:nvPr/>
+        </p:nvSpPr>
+        <p:spPr>
+          <a:xfrm>
+            <a:off x="731520" y="457200"/>
+            <a:ext cx="2743200" cy="274320"/>
+          </a:xfrm>
+          <a:prstGeom prst="rect">
+            <a:avLst/>
+          </a:prstGeom>
+          <a:noFill/>
+        </p:spPr>
+        <p:txBody>
+          <a:bodyPr wrap="square">
+            <a:spAutoFit/>
+          </a:bodyPr>
+          <a:lstStyle/>
+          <a:p>
+            <a:pPr algn="l">
+              <a:defRPr sz="1100" b="1">
+                <a:solidFill>
+                  <a:srgbClr val="0077B6"/>
+                </a:solidFill>
+                <a:latin typeface="Noto Sans JP"/>
+              </a:defRPr>
+            </a:pPr>
+            <a:r>
+              <a:t>INSIGHT</a:t>
+            </a:r>
+          </a:p>
+        </p:txBody>
+      </p:sp>
+      <p:sp>
+        <p:nvSpPr>
+          <p:cNvPr id="4" name="TextBox 3"/>
+          <p:cNvSpPr txBox="1"/>
+          <p:nvPr/>
+        </p:nvSpPr>
+        <p:spPr>
+          <a:xfrm>
+            <a:off x="731520" y="822960"/>
+            <a:ext cx="5486400" cy="640080"/>
+          </a:xfrm>
+          <a:prstGeom prst="rect">
+            <a:avLst/>
+          </a:prstGeom>
+          <a:noFill/>
+        </p:spPr>
+        <p:txBody>
+          <a:bodyPr wrap="square">
+            <a:spAutoFit/>
+          </a:bodyPr>
+          <a:lstStyle/>
+          <a:p>
+            <a:pPr algn="l">
+              <a:defRPr sz="3200" b="1">
+                <a:solidFill>
+                  <a:srgbClr val="023E8A"/>
+                </a:solidFill>
+                <a:latin typeface="Noto Sans JP"/>
+              </a:defRPr>
+            </a:pPr>
+            <a:r>
+              <a:t>考察と提案</a:t>
+            </a:r>
+          </a:p>
+        </p:txBody>
+      </p:sp>
+      <p:sp>
+        <p:nvSpPr>
+          <p:cNvPr id="5" name="TextBox 4"/>
+          <p:cNvSpPr txBox="1"/>
+          <p:nvPr/>
+        </p:nvSpPr>
+        <p:spPr>
+          <a:xfrm>
+            <a:off x="731520" y="1645920"/>
+            <a:ext cx="5486400" cy="457200"/>
+          </a:xfrm>
+          <a:prstGeom prst="rect">
+            <a:avLst/>
+          </a:prstGeom>
+          <a:noFill/>
+        </p:spPr>
+        <p:txBody>
+          <a:bodyPr wrap="square">
+            <a:spAutoFit/>
+          </a:bodyPr>
+          <a:lstStyle/>
+          <a:p>
+            <a:pPr algn="l">
+              <a:defRPr sz="2000" b="1">
+                <a:solidFill>
+                  <a:srgbClr val="023E8A"/>
+                </a:solidFill>
+                <a:latin typeface="Noto Sans JP"/>
+              </a:defRPr>
+            </a:pPr>
+            <a:r>
+              <a:t>データから見えたこと</a:t>
+            </a:r>
+          </a:p>
+        </p:txBody>
+      </p:sp>
+      <p:sp>
+        <p:nvSpPr>
+          <p:cNvPr id="6" name="TextBox 5"/>
+          <p:cNvSpPr txBox="1"/>
+          <p:nvPr/>
+        </p:nvSpPr>
+        <p:spPr>
+          <a:xfrm>
+            <a:off x="731520" y="2286000"/>
+            <a:ext cx="5486400" cy="2743200"/>
+          </a:xfrm>
+          <a:prstGeom prst="rect">
+            <a:avLst/>
+          </a:prstGeom>
+          <a:noFill/>
+        </p:spPr>
+        <p:txBody>
+          <a:bodyPr wrap="square">
+            <a:spAutoFit/>
+          </a:bodyPr>
+          <a:lstStyle/>
+          <a:p>
+            <a:pPr>
+              <a:spcAft>
+                <a:spcPts val="1280"/>
+              </a:spcAft>
+              <a:defRPr sz="1600">
+                <a:solidFill>
+                  <a:srgbClr val="475569"/>
+                </a:solidFill>
+                <a:latin typeface="Noto Sans JP"/>
+              </a:defRPr>
+            </a:pPr>
+            <a:r>
+              <a:t>• ここに考察を記入</a:t>
+            </a:r>
+          </a:p>
+          <a:p>
+            <a:pPr>
+              <a:spcAft>
+                <a:spcPts val="1280"/>
+              </a:spcAft>
+              <a:defRPr sz="1600">
+                <a:solidFill>
+                  <a:srgbClr val="475569"/>
+                </a:solidFill>
+                <a:latin typeface="Noto Sans JP"/>
+              </a:defRPr>
+            </a:pPr>
+            <a:r>
+              <a:t>• データが示す意味</a:t>
+            </a:r>
+          </a:p>
+          <a:p>
+            <a:pPr>
+              <a:spcAft>
+                <a:spcPts val="1280"/>
+              </a:spcAft>
+              <a:defRPr sz="1600">
+                <a:solidFill>
+                  <a:srgbClr val="475569"/>
+                </a:solidFill>
+                <a:latin typeface="Noto Sans JP"/>
+              </a:defRPr>
+            </a:pPr>
+            <a:r>
+              <a:t>• ビジネスへの示唆</a:t>
+            </a:r>
+          </a:p>
+        </p:txBody>
+      </p:sp>
+      <p:sp>
+        <p:nvSpPr>
+          <p:cNvPr id="7" name="Rounded Rectangle 6"/>
           <p:cNvSpPr/>
           <p:nvPr/>
         </p:nvSpPr>
         <p:spPr>
           <a:xfrm>
-            <a:off x="0" y="0"/>
-            <a:ext cx="12191695" cy="73152"/>
-          </a:xfrm>
-          <a:prstGeom prst="rect">
+            <a:off x="6858000" y="1645920"/>
+            <a:ext cx="4572000" cy="3200400"/>
+          </a:xfrm>
+          <a:prstGeom prst="roundRect">
             <a:avLst/>
           </a:prstGeom>
           <a:solidFill>
-            <a:srgbClr val="0077B6"/>
+            <a:srgbClr val="E8F5E9"/>
           </a:solidFill>
           <a:ln>
             <a:noFill/>
@@ -5604,116 +5521,14 @@
       </p:sp>
       <p:sp>
         <p:nvSpPr>
-          <p:cNvPr id="3" name="TextBox 2"/>
+          <p:cNvPr id="8" name="TextBox 7"/>
           <p:cNvSpPr txBox="1"/>
           <p:nvPr/>
         </p:nvSpPr>
         <p:spPr>
           <a:xfrm>
-            <a:off x="731520" y="365760"/>
-            <a:ext cx="2743200" cy="274320"/>
-          </a:xfrm>
-          <a:prstGeom prst="rect">
-            <a:avLst/>
-          </a:prstGeom>
-          <a:noFill/>
-        </p:spPr>
-        <p:txBody>
-          <a:bodyPr wrap="square"/>
-          <a:lstStyle/>
-          <a:p>
-            <a:pPr algn="l">
-              <a:defRPr sz="1100" b="1">
-                <a:solidFill>
-                  <a:srgbClr val="0077B6"/>
-                </a:solidFill>
-                <a:latin typeface="Noto Sans JP"/>
-              </a:defRPr>
-            </a:pPr>
-            <a:r>
-              <a:t>INSIGHT</a:t>
-            </a:r>
-          </a:p>
-        </p:txBody>
-      </p:sp>
-      <p:sp>
-        <p:nvSpPr>
-          <p:cNvPr id="4" name="TextBox 3"/>
-          <p:cNvSpPr txBox="1"/>
-          <p:nvPr/>
-        </p:nvSpPr>
-        <p:spPr>
-          <a:xfrm>
-            <a:off x="731520" y="731520"/>
-            <a:ext cx="5486400" cy="640080"/>
-          </a:xfrm>
-          <a:prstGeom prst="rect">
-            <a:avLst/>
-          </a:prstGeom>
-          <a:noFill/>
-        </p:spPr>
-        <p:txBody>
-          <a:bodyPr wrap="square"/>
-          <a:lstStyle/>
-          <a:p>
-            <a:pPr algn="l">
-              <a:defRPr sz="3200" b="1">
-                <a:solidFill>
-                  <a:srgbClr val="023E8A"/>
-                </a:solidFill>
-                <a:latin typeface="Noto Sans JP"/>
-              </a:defRPr>
-            </a:pPr>
-            <a:r>
-              <a:t>考察と提案</a:t>
-            </a:r>
-          </a:p>
-        </p:txBody>
-      </p:sp>
-      <p:sp>
-        <p:nvSpPr>
-          <p:cNvPr id="5" name="TextBox 4"/>
-          <p:cNvSpPr txBox="1"/>
-          <p:nvPr/>
-        </p:nvSpPr>
-        <p:spPr>
-          <a:xfrm>
-            <a:off x="731520" y="1645920"/>
-            <a:ext cx="5486400" cy="457200"/>
-          </a:xfrm>
-          <a:prstGeom prst="rect">
-            <a:avLst/>
-          </a:prstGeom>
-          <a:noFill/>
-        </p:spPr>
-        <p:txBody>
-          <a:bodyPr wrap="square"/>
-          <a:lstStyle/>
-          <a:p>
-            <a:pPr algn="l">
-              <a:defRPr sz="2000" b="1">
-                <a:solidFill>
-                  <a:srgbClr val="023E8A"/>
-                </a:solidFill>
-                <a:latin typeface="Noto Sans JP"/>
-              </a:defRPr>
-            </a:pPr>
-            <a:r>
-              <a:t>データから見えたこと</a:t>
-            </a:r>
-          </a:p>
-        </p:txBody>
-      </p:sp>
-      <p:sp>
-        <p:nvSpPr>
-          <p:cNvPr id="6" name="TextBox 5"/>
-          <p:cNvSpPr txBox="1"/>
-          <p:nvPr/>
-        </p:nvSpPr>
-        <p:spPr>
-          <a:xfrm>
-            <a:off x="731520" y="2286000"/>
-            <a:ext cx="5486400" cy="2743200"/>
+            <a:off x="7132320" y="1828800"/>
+            <a:ext cx="4023360" cy="457200"/>
           </a:xfrm>
           <a:prstGeom prst="rect">
             <a:avLst/>
@@ -5726,11 +5541,47 @@
           </a:bodyPr>
           <a:lstStyle/>
           <a:p>
+            <a:pPr algn="l">
+              <a:defRPr sz="2000" b="1">
+                <a:solidFill>
+                  <a:srgbClr val="023E8A"/>
+                </a:solidFill>
+                <a:latin typeface="Noto Sans JP"/>
+              </a:defRPr>
+            </a:pPr>
+            <a:r>
+              <a:t>提案</a:t>
+            </a:r>
+          </a:p>
+        </p:txBody>
+      </p:sp>
+      <p:sp>
+        <p:nvSpPr>
+          <p:cNvPr id="9" name="TextBox 8"/>
+          <p:cNvSpPr txBox="1"/>
+          <p:nvPr/>
+        </p:nvSpPr>
+        <p:spPr>
+          <a:xfrm>
+            <a:off x="7132320" y="2377440"/>
+            <a:ext cx="4023360" cy="2286000"/>
+          </a:xfrm>
+          <a:prstGeom prst="rect">
+            <a:avLst/>
+          </a:prstGeom>
+          <a:noFill/>
+        </p:spPr>
+        <p:txBody>
+          <a:bodyPr wrap="square">
+            <a:spAutoFit/>
+          </a:bodyPr>
+          <a:lstStyle/>
+          <a:p>
             <a:pPr>
               <a:spcAft>
-                <a:spcPts val="1280"/>
+                <a:spcPts val="700"/>
               </a:spcAft>
-              <a:defRPr sz="1600">
+              <a:defRPr sz="1400">
                 <a:solidFill>
                   <a:srgbClr val="475569"/>
                 </a:solidFill>
@@ -5738,15 +5589,15 @@
               </a:defRPr>
             </a:pPr>
             <a:r>
-              <a:t>• ここに考察を記入</a:t>
+              <a:t>サンエーへの提案や</a:t>
             </a:r>
           </a:p>
           <a:p>
             <a:pPr>
               <a:spcAft>
-                <a:spcPts val="1280"/>
+                <a:spcPts val="700"/>
               </a:spcAft>
-              <a:defRPr sz="1600">
+              <a:defRPr sz="1400">
                 <a:solidFill>
                   <a:srgbClr val="475569"/>
                 </a:solidFill>
@@ -5754,43 +5605,56 @@
               </a:defRPr>
             </a:pPr>
             <a:r>
-              <a:t>• データが示す意味</a:t>
+              <a:t>アイデアを記入してください。</a:t>
             </a:r>
           </a:p>
           <a:p>
             <a:pPr>
               <a:spcAft>
-                <a:spcPts val="1280"/>
+                <a:spcPts val="700"/>
               </a:spcAft>
-              <a:defRPr sz="1600">
+              <a:defRPr sz="1400">
                 <a:solidFill>
                   <a:srgbClr val="475569"/>
                 </a:solidFill>
                 <a:latin typeface="Noto Sans JP"/>
               </a:defRPr>
             </a:pPr>
-            <a:r>
-              <a:t>• ビジネスへの示唆</a:t>
-            </a:r>
-          </a:p>
-        </p:txBody>
-      </p:sp>
-      <p:sp>
-        <p:nvSpPr>
-          <p:cNvPr id="7" name="Rounded Rectangle 6"/>
+          </a:p>
+          <a:p>
+            <a:pPr>
+              <a:spcAft>
+                <a:spcPts val="700"/>
+              </a:spcAft>
+              <a:defRPr sz="1400">
+                <a:solidFill>
+                  <a:srgbClr val="475569"/>
+                </a:solidFill>
+                <a:latin typeface="Noto Sans JP"/>
+              </a:defRPr>
+            </a:pPr>
+            <a:r>
+              <a:t>例: 旧盆2日前からの在庫積み増し</a:t>
+            </a:r>
+          </a:p>
+        </p:txBody>
+      </p:sp>
+      <p:sp>
+        <p:nvSpPr>
+          <p:cNvPr id="10" name="Rounded Rectangle 9"/>
           <p:cNvSpPr/>
           <p:nvPr/>
         </p:nvSpPr>
         <p:spPr>
           <a:xfrm>
-            <a:off x="6858000" y="1645920"/>
-            <a:ext cx="4572000" cy="3200400"/>
+            <a:off x="731520" y="5303520"/>
+            <a:ext cx="10698480" cy="822960"/>
           </a:xfrm>
           <a:prstGeom prst="roundRect">
             <a:avLst/>
           </a:prstGeom>
           <a:solidFill>
-            <a:srgbClr val="E8F5E9"/>
+            <a:srgbClr val="FFF3E0"/>
           </a:solidFill>
           <a:ln>
             <a:noFill/>
@@ -5820,48 +5684,14 @@
       </p:sp>
       <p:sp>
         <p:nvSpPr>
-          <p:cNvPr id="8" name="TextBox 7"/>
+          <p:cNvPr id="11" name="TextBox 10"/>
           <p:cNvSpPr txBox="1"/>
           <p:nvPr/>
         </p:nvSpPr>
         <p:spPr>
           <a:xfrm>
-            <a:off x="7132320" y="1828800"/>
-            <a:ext cx="4023360" cy="457200"/>
-          </a:xfrm>
-          <a:prstGeom prst="rect">
-            <a:avLst/>
-          </a:prstGeom>
-          <a:noFill/>
-        </p:spPr>
-        <p:txBody>
-          <a:bodyPr wrap="square"/>
-          <a:lstStyle/>
-          <a:p>
-            <a:pPr algn="l">
-              <a:defRPr sz="2000" b="1">
-                <a:solidFill>
-                  <a:srgbClr val="023E8A"/>
-                </a:solidFill>
-                <a:latin typeface="Noto Sans JP"/>
-              </a:defRPr>
-            </a:pPr>
-            <a:r>
-              <a:t>提案</a:t>
-            </a:r>
-          </a:p>
-        </p:txBody>
-      </p:sp>
-      <p:sp>
-        <p:nvSpPr>
-          <p:cNvPr id="9" name="TextBox 8"/>
-          <p:cNvSpPr txBox="1"/>
-          <p:nvPr/>
-        </p:nvSpPr>
-        <p:spPr>
-          <a:xfrm>
-            <a:off x="7132320" y="2377440"/>
-            <a:ext cx="4023360" cy="2286000"/>
+            <a:off x="1005840" y="5394960"/>
+            <a:ext cx="10149840" cy="640080"/>
           </a:xfrm>
           <a:prstGeom prst="rect">
             <a:avLst/>
@@ -5874,131 +5704,6 @@
           </a:bodyPr>
           <a:lstStyle/>
           <a:p>
-            <a:pPr>
-              <a:spcAft>
-                <a:spcPts val="700"/>
-              </a:spcAft>
-              <a:defRPr sz="1400">
-                <a:solidFill>
-                  <a:srgbClr val="475569"/>
-                </a:solidFill>
-                <a:latin typeface="Noto Sans JP"/>
-              </a:defRPr>
-            </a:pPr>
-            <a:r>
-              <a:t>サンエーへの提案や</a:t>
-            </a:r>
-          </a:p>
-          <a:p>
-            <a:pPr>
-              <a:spcAft>
-                <a:spcPts val="700"/>
-              </a:spcAft>
-              <a:defRPr sz="1400">
-                <a:solidFill>
-                  <a:srgbClr val="475569"/>
-                </a:solidFill>
-                <a:latin typeface="Noto Sans JP"/>
-              </a:defRPr>
-            </a:pPr>
-            <a:r>
-              <a:t>アイデアを記入してください。</a:t>
-            </a:r>
-          </a:p>
-          <a:p>
-            <a:pPr>
-              <a:spcAft>
-                <a:spcPts val="700"/>
-              </a:spcAft>
-              <a:defRPr sz="1400">
-                <a:solidFill>
-                  <a:srgbClr val="475569"/>
-                </a:solidFill>
-                <a:latin typeface="Noto Sans JP"/>
-              </a:defRPr>
-            </a:pPr>
-          </a:p>
-          <a:p>
-            <a:pPr>
-              <a:spcAft>
-                <a:spcPts val="700"/>
-              </a:spcAft>
-              <a:defRPr sz="1400">
-                <a:solidFill>
-                  <a:srgbClr val="475569"/>
-                </a:solidFill>
-                <a:latin typeface="Noto Sans JP"/>
-              </a:defRPr>
-            </a:pPr>
-            <a:r>
-              <a:t>例: 旧盆2日前からの在庫積み増し</a:t>
-            </a:r>
-          </a:p>
-        </p:txBody>
-      </p:sp>
-      <p:sp>
-        <p:nvSpPr>
-          <p:cNvPr id="10" name="Rounded Rectangle 9"/>
-          <p:cNvSpPr/>
-          <p:nvPr/>
-        </p:nvSpPr>
-        <p:spPr>
-          <a:xfrm>
-            <a:off x="731520" y="5303520"/>
-            <a:ext cx="10698480" cy="822960"/>
-          </a:xfrm>
-          <a:prstGeom prst="roundRect">
-            <a:avLst/>
-          </a:prstGeom>
-          <a:solidFill>
-            <a:srgbClr val="FFF3E0"/>
-          </a:solidFill>
-          <a:ln>
-            <a:noFill/>
-          </a:ln>
-        </p:spPr>
-        <p:style>
-          <a:lnRef idx="1">
-            <a:schemeClr val="accent1"/>
-          </a:lnRef>
-          <a:fillRef idx="3">
-            <a:schemeClr val="accent1"/>
-          </a:fillRef>
-          <a:effectRef idx="2">
-            <a:schemeClr val="accent1"/>
-          </a:effectRef>
-          <a:fontRef idx="minor">
-            <a:schemeClr val="lt1"/>
-          </a:fontRef>
-        </p:style>
-        <p:txBody>
-          <a:bodyPr rtlCol="0" anchor="ctr"/>
-          <a:lstStyle/>
-          <a:p>
-            <a:pPr algn="ctr"/>
-          </a:p>
-        </p:txBody>
-      </p:sp>
-      <p:sp>
-        <p:nvSpPr>
-          <p:cNvPr id="11" name="TextBox 10"/>
-          <p:cNvSpPr txBox="1"/>
-          <p:nvPr/>
-        </p:nvSpPr>
-        <p:spPr>
-          <a:xfrm>
-            <a:off x="1005840" y="5394960"/>
-            <a:ext cx="10149840" cy="640080"/>
-          </a:xfrm>
-          <a:prstGeom prst="rect">
-            <a:avLst/>
-          </a:prstGeom>
-          <a:noFill/>
-        </p:spPr>
-        <p:txBody>
-          <a:bodyPr wrap="square"/>
-          <a:lstStyle/>
-          <a:p>
             <a:pPr algn="l">
               <a:defRPr sz="1400" b="0">
                 <a:solidFill>
@@ -6015,57 +5720,14 @@
       </p:sp>
       <p:sp>
         <p:nvSpPr>
-          <p:cNvPr id="12" name="Rectangle 11"/>
-          <p:cNvSpPr/>
-          <p:nvPr/>
-        </p:nvSpPr>
-        <p:spPr>
-          <a:xfrm>
-            <a:off x="0" y="6492240"/>
-            <a:ext cx="12191695" cy="18288"/>
-          </a:xfrm>
-          <a:prstGeom prst="rect">
-            <a:avLst/>
-          </a:prstGeom>
-          <a:solidFill>
-            <a:srgbClr val="E2E8F0"/>
-          </a:solidFill>
-          <a:ln>
-            <a:noFill/>
-          </a:ln>
-        </p:spPr>
-        <p:style>
-          <a:lnRef idx="1">
-            <a:schemeClr val="accent1"/>
-          </a:lnRef>
-          <a:fillRef idx="3">
-            <a:schemeClr val="accent1"/>
-          </a:fillRef>
-          <a:effectRef idx="2">
-            <a:schemeClr val="accent1"/>
-          </a:effectRef>
-          <a:fontRef idx="minor">
-            <a:schemeClr val="lt1"/>
-          </a:fontRef>
-        </p:style>
-        <p:txBody>
-          <a:bodyPr rtlCol="0" anchor="ctr"/>
-          <a:lstStyle/>
-          <a:p>
-            <a:pPr algn="ctr"/>
-          </a:p>
-        </p:txBody>
-      </p:sp>
-      <p:sp>
-        <p:nvSpPr>
-          <p:cNvPr id="13" name="TextBox 12"/>
+          <p:cNvPr id="12" name="TextBox 11"/>
           <p:cNvSpPr txBox="1"/>
           <p:nvPr/>
         </p:nvSpPr>
         <p:spPr>
           <a:xfrm>
-            <a:off x="457200" y="6537960"/>
-            <a:ext cx="7315200" cy="274320"/>
+            <a:off x="10972800" y="6492240"/>
+            <a:ext cx="914400" cy="274320"/>
           </a:xfrm>
           <a:prstGeom prst="rect">
             <a:avLst/>
@@ -6073,41 +5735,9 @@
           <a:noFill/>
         </p:spPr>
         <p:txBody>
-          <a:bodyPr wrap="square"/>
-          <a:lstStyle/>
-          <a:p>
-            <a:pPr algn="l">
-              <a:defRPr sz="900" b="0">
-                <a:solidFill>
-                  <a:srgbClr val="94A3B8"/>
-                </a:solidFill>
-                <a:latin typeface="Noto Sans JP"/>
-              </a:defRPr>
-            </a:pPr>
-            <a:r>
-              <a:t>データで考える、沖縄の「ちょうどいい」と「もっといい」</a:t>
-            </a:r>
-          </a:p>
-        </p:txBody>
-      </p:sp>
-      <p:sp>
-        <p:nvSpPr>
-          <p:cNvPr id="14" name="TextBox 13"/>
-          <p:cNvSpPr txBox="1"/>
-          <p:nvPr/>
-        </p:nvSpPr>
-        <p:spPr>
-          <a:xfrm>
-            <a:off x="10972800" y="6537960"/>
-            <a:ext cx="914400" cy="274320"/>
-          </a:xfrm>
-          <a:prstGeom prst="rect">
-            <a:avLst/>
-          </a:prstGeom>
-          <a:noFill/>
-        </p:spPr>
-        <p:txBody>
-          <a:bodyPr wrap="square"/>
+          <a:bodyPr wrap="square">
+            <a:spAutoFit/>
+          </a:bodyPr>
           <a:lstStyle/>
           <a:p>
             <a:pPr algn="r">
@@ -6142,12 +5772,20 @@
         <p:nvPr/>
       </p:nvGrpSpPr>
       <p:grpSpPr/>
-      <p:sp>
-        <p:nvSpPr>
-          <p:cNvPr id="2" name="Rectangle 1"/>
-          <p:cNvSpPr/>
-          <p:nvPr/>
-        </p:nvSpPr>
+      <p:pic>
+        <p:nvPicPr>
+          <p:cNvPr id="2" name="Picture 1" descr="section.png"/>
+          <p:cNvPicPr>
+            <a:picLocks noChangeAspect="1"/>
+          </p:cNvPicPr>
+          <p:nvPr/>
+        </p:nvPicPr>
+        <p:blipFill>
+          <a:blip r:embed="rId2"/>
+          <a:stretch>
+            <a:fillRect/>
+          </a:stretch>
+        </p:blipFill>
         <p:spPr>
           <a:xfrm>
             <a:off x="0" y="0"/>
@@ -6156,8 +5794,96 @@
           <a:prstGeom prst="rect">
             <a:avLst/>
           </a:prstGeom>
+        </p:spPr>
+      </p:pic>
+      <p:sp>
+        <p:nvSpPr>
+          <p:cNvPr id="3" name="TextBox 2"/>
+          <p:cNvSpPr txBox="1"/>
+          <p:nvPr/>
+        </p:nvSpPr>
+        <p:spPr>
+          <a:xfrm>
+            <a:off x="1371600" y="1828800"/>
+            <a:ext cx="9418320" cy="1371600"/>
+          </a:xfrm>
+          <a:prstGeom prst="rect">
+            <a:avLst/>
+          </a:prstGeom>
+          <a:noFill/>
+        </p:spPr>
+        <p:txBody>
+          <a:bodyPr wrap="square">
+            <a:spAutoFit/>
+          </a:bodyPr>
+          <a:lstStyle/>
+          <a:p>
+            <a:pPr algn="ctr">
+              <a:defRPr sz="4800" b="1">
+                <a:solidFill>
+                  <a:srgbClr val="FFFFFF"/>
+                </a:solidFill>
+                <a:latin typeface="Noto Sans JP"/>
+              </a:defRPr>
+            </a:pPr>
+            <a:r>
+              <a:t>ありがとうございました</a:t>
+            </a:r>
+          </a:p>
+        </p:txBody>
+      </p:sp>
+      <p:sp>
+        <p:nvSpPr>
+          <p:cNvPr id="4" name="TextBox 3"/>
+          <p:cNvSpPr txBox="1"/>
+          <p:nvPr/>
+        </p:nvSpPr>
+        <p:spPr>
+          <a:xfrm>
+            <a:off x="1371600" y="3200400"/>
+            <a:ext cx="9418320" cy="640080"/>
+          </a:xfrm>
+          <a:prstGeom prst="rect">
+            <a:avLst/>
+          </a:prstGeom>
+          <a:noFill/>
+        </p:spPr>
+        <p:txBody>
+          <a:bodyPr wrap="square">
+            <a:spAutoFit/>
+          </a:bodyPr>
+          <a:lstStyle/>
+          <a:p>
+            <a:pPr algn="ctr">
+              <a:defRPr sz="2000" b="0">
+                <a:solidFill>
+                  <a:srgbClr val="90E0EF"/>
+                </a:solidFill>
+                <a:latin typeface="Noto Sans JP"/>
+              </a:defRPr>
+            </a:pPr>
+            <a:r>
+              <a:t>ご質問・フィードバックをお願いします！</a:t>
+            </a:r>
+          </a:p>
+        </p:txBody>
+      </p:sp>
+      <p:sp>
+        <p:nvSpPr>
+          <p:cNvPr id="5" name="Rectangle 4"/>
+          <p:cNvSpPr/>
+          <p:nvPr/>
+        </p:nvSpPr>
+        <p:spPr>
+          <a:xfrm>
+            <a:off x="4114800" y="3931920"/>
+            <a:ext cx="3931920" cy="27432"/>
+          </a:xfrm>
+          <a:prstGeom prst="rect">
+            <a:avLst/>
+          </a:prstGeom>
           <a:solidFill>
-            <a:srgbClr val="023E8A"/>
+            <a:srgbClr val="88AADD"/>
           </a:solidFill>
           <a:ln>
             <a:noFill/>
@@ -6187,57 +5913,14 @@
       </p:sp>
       <p:sp>
         <p:nvSpPr>
-          <p:cNvPr id="3" name="Rectangle 2"/>
-          <p:cNvSpPr/>
-          <p:nvPr/>
-        </p:nvSpPr>
-        <p:spPr>
-          <a:xfrm>
-            <a:off x="0" y="5029200"/>
-            <a:ext cx="12191695" cy="1828800"/>
-          </a:xfrm>
-          <a:prstGeom prst="rect">
-            <a:avLst/>
-          </a:prstGeom>
-          <a:solidFill>
-            <a:srgbClr val="0077B6"/>
-          </a:solidFill>
-          <a:ln>
-            <a:noFill/>
-          </a:ln>
-        </p:spPr>
-        <p:style>
-          <a:lnRef idx="1">
-            <a:schemeClr val="accent1"/>
-          </a:lnRef>
-          <a:fillRef idx="3">
-            <a:schemeClr val="accent1"/>
-          </a:fillRef>
-          <a:effectRef idx="2">
-            <a:schemeClr val="accent1"/>
-          </a:effectRef>
-          <a:fontRef idx="minor">
-            <a:schemeClr val="lt1"/>
-          </a:fontRef>
-        </p:style>
-        <p:txBody>
-          <a:bodyPr rtlCol="0" anchor="ctr"/>
-          <a:lstStyle/>
-          <a:p>
-            <a:pPr algn="ctr"/>
-          </a:p>
-        </p:txBody>
-      </p:sp>
-      <p:sp>
-        <p:nvSpPr>
-          <p:cNvPr id="4" name="TextBox 3"/>
+          <p:cNvPr id="6" name="TextBox 5"/>
           <p:cNvSpPr txBox="1"/>
           <p:nvPr/>
         </p:nvSpPr>
         <p:spPr>
           <a:xfrm>
-            <a:off x="1371600" y="1828800"/>
-            <a:ext cx="9418320" cy="1371600"/>
+            <a:off x="1371600" y="4114800"/>
+            <a:ext cx="9418320" cy="731520"/>
           </a:xfrm>
           <a:prstGeom prst="rect">
             <a:avLst/>
@@ -6245,11 +5928,13 @@
           <a:noFill/>
         </p:spPr>
         <p:txBody>
-          <a:bodyPr wrap="square"/>
+          <a:bodyPr wrap="square">
+            <a:spAutoFit/>
+          </a:bodyPr>
           <a:lstStyle/>
           <a:p>
             <a:pPr algn="ctr">
-              <a:defRPr sz="4800" b="1">
+              <a:defRPr sz="2600" b="1">
                 <a:solidFill>
                   <a:srgbClr val="FFFFFF"/>
                 </a:solidFill>
@@ -6257,85 +5942,8 @@
               </a:defRPr>
             </a:pPr>
             <a:r>
-              <a:t>ありがとうございました</a:t>
-            </a:r>
-          </a:p>
-        </p:txBody>
-      </p:sp>
-      <p:sp>
-        <p:nvSpPr>
-          <p:cNvPr id="5" name="TextBox 4"/>
-          <p:cNvSpPr txBox="1"/>
-          <p:nvPr/>
-        </p:nvSpPr>
-        <p:spPr>
-          <a:xfrm>
-            <a:off x="1371600" y="3200400"/>
-            <a:ext cx="9418320" cy="640080"/>
-          </a:xfrm>
-          <a:prstGeom prst="rect">
-            <a:avLst/>
-          </a:prstGeom>
-          <a:noFill/>
-        </p:spPr>
-        <p:txBody>
-          <a:bodyPr wrap="square"/>
-          <a:lstStyle/>
-          <a:p>
-            <a:pPr algn="ctr">
-              <a:defRPr sz="2000" b="0">
-                <a:solidFill>
-                  <a:srgbClr val="90E0EF"/>
-                </a:solidFill>
-                <a:latin typeface="Noto Sans JP"/>
-              </a:defRPr>
-            </a:pPr>
-            <a:r>
-              <a:t>ご質問・フィードバックをお願いします！</a:t>
-            </a:r>
-          </a:p>
-        </p:txBody>
-      </p:sp>
-      <p:sp>
-        <p:nvSpPr>
-          <p:cNvPr id="6" name="Rectangle 5"/>
-          <p:cNvSpPr/>
-          <p:nvPr/>
-        </p:nvSpPr>
-        <p:spPr>
-          <a:xfrm>
-            <a:off x="4114800" y="3931920"/>
-            <a:ext cx="3931920" cy="27432"/>
-          </a:xfrm>
-          <a:prstGeom prst="rect">
-            <a:avLst/>
-          </a:prstGeom>
-          <a:solidFill>
-            <a:srgbClr val="5588BB"/>
-          </a:solidFill>
-          <a:ln>
-            <a:noFill/>
-          </a:ln>
-        </p:spPr>
-        <p:style>
-          <a:lnRef idx="1">
-            <a:schemeClr val="accent1"/>
-          </a:lnRef>
-          <a:fillRef idx="3">
-            <a:schemeClr val="accent1"/>
-          </a:fillRef>
-          <a:effectRef idx="2">
-            <a:schemeClr val="accent1"/>
-          </a:effectRef>
-          <a:fontRef idx="minor">
-            <a:schemeClr val="lt1"/>
-          </a:fontRef>
-        </p:style>
-        <p:txBody>
-          <a:bodyPr rtlCol="0" anchor="ctr"/>
-          <a:lstStyle/>
-          <a:p>
-            <a:pPr algn="ctr"/>
+              <a:t>チーム名</a:t>
+            </a:r>
           </a:p>
         </p:txBody>
       </p:sp>
@@ -6347,8 +5955,8 @@
         </p:nvSpPr>
         <p:spPr>
           <a:xfrm>
-            <a:off x="1371600" y="4114800"/>
-            <a:ext cx="9418320" cy="731520"/>
+            <a:off x="1371600" y="5669280"/>
+            <a:ext cx="9418320" cy="457200"/>
           </a:xfrm>
           <a:prstGeom prst="rect">
             <a:avLst/>
@@ -6356,19 +5964,21 @@
           <a:noFill/>
         </p:spPr>
         <p:txBody>
-          <a:bodyPr wrap="square"/>
+          <a:bodyPr wrap="square">
+            <a:spAutoFit/>
+          </a:bodyPr>
           <a:lstStyle/>
           <a:p>
             <a:pPr algn="ctr">
-              <a:defRPr sz="2600" b="1">
-                <a:solidFill>
-                  <a:srgbClr val="FFFFFF"/>
+              <a:defRPr sz="1400" b="0">
+                <a:solidFill>
+                  <a:srgbClr val="AABBDD"/>
                 </a:solidFill>
                 <a:latin typeface="Noto Sans JP"/>
               </a:defRPr>
             </a:pPr>
             <a:r>
-              <a:t>チーム名</a:t>
+              <a:t>#Jauger_okinawa</a:t>
             </a:r>
           </a:p>
         </p:txBody>
@@ -6381,40 +5991,6 @@
         </p:nvSpPr>
         <p:spPr>
           <a:xfrm>
-            <a:off x="1371600" y="5669280"/>
-            <a:ext cx="9418320" cy="457200"/>
-          </a:xfrm>
-          <a:prstGeom prst="rect">
-            <a:avLst/>
-          </a:prstGeom>
-          <a:noFill/>
-        </p:spPr>
-        <p:txBody>
-          <a:bodyPr wrap="square"/>
-          <a:lstStyle/>
-          <a:p>
-            <a:pPr algn="ctr">
-              <a:defRPr sz="1400" b="0">
-                <a:solidFill>
-                  <a:srgbClr val="88AACC"/>
-                </a:solidFill>
-                <a:latin typeface="Noto Sans JP"/>
-              </a:defRPr>
-            </a:pPr>
-            <a:r>
-              <a:t>#Jauger_okinawa</a:t>
-            </a:r>
-          </a:p>
-        </p:txBody>
-      </p:sp>
-      <p:sp>
-        <p:nvSpPr>
-          <p:cNvPr id="9" name="TextBox 8"/>
-          <p:cNvSpPr txBox="1"/>
-          <p:nvPr/>
-        </p:nvSpPr>
-        <p:spPr>
-          <a:xfrm>
             <a:off x="1371600" y="6126480"/>
             <a:ext cx="9418320" cy="365760"/>
           </a:xfrm>
@@ -6424,13 +6000,15 @@
           <a:noFill/>
         </p:spPr>
         <p:txBody>
-          <a:bodyPr wrap="square"/>
+          <a:bodyPr wrap="square">
+            <a:spAutoFit/>
+          </a:bodyPr>
           <a:lstStyle/>
           <a:p>
             <a:pPr algn="ctr">
               <a:defRPr sz="1100" b="0">
                 <a:solidFill>
-                  <a:srgbClr val="6688AA"/>
+                  <a:srgbClr val="88AACC"/>
                 </a:solidFill>
                 <a:latin typeface="Noto Sans JP"/>
               </a:defRPr>

--- a/site/slides/presentation_template.pptx
+++ b/site/slides/presentation_template.pptx
@@ -4094,7 +4094,7 @@
               </a:defRPr>
             </a:pPr>
             <a:r>
-              <a:t>使用した分析手法を記入</a:t>
+              <a:t>AIに聞いた質問や手法を記入</a:t>
             </a:r>
           </a:p>
         </p:txBody>
@@ -4399,7 +4399,7 @@
               </a:defRPr>
             </a:pPr>
             <a:r>
-              <a:t>-- ここに実行した SQL を貼り付け</a:t>
+              <a:t>-- ここに Conversational Analytics に入力したプロンプトを貼り付け</a:t>
             </a:r>
           </a:p>
           <a:p>
@@ -4415,7 +4415,7 @@
               </a:defRPr>
             </a:pPr>
             <a:r>
-              <a:t>SELECT ...</a:t>
+              <a:t>例: 「旧盆期間の売上を日別に集計して、前週と比較してください」</a:t>
             </a:r>
           </a:p>
           <a:p>
@@ -4431,7 +4431,7 @@
               </a:defRPr>
             </a:pPr>
             <a:r>
-              <a:t>FROM sana_ryudai_handson.customer_sales_details</a:t>
+              <a:t>例: 「一番売れた商品トップ10を教えてください」</a:t>
             </a:r>
           </a:p>
           <a:p>
@@ -4446,9 +4446,6 @@
                 <a:latin typeface="Courier New"/>
               </a:defRPr>
             </a:pPr>
-            <a:r>
-              <a:t>WHERE ...</a:t>
-            </a:r>
           </a:p>
         </p:txBody>
       </p:sp>
